--- a/Fase2/Evidencias Proyecto/Presentación Reparte+.pptx
+++ b/Fase2/Evidencias Proyecto/Presentación Reparte+.pptx
@@ -24,10 +24,6 @@
     <p:sldId id="269" r:id="rId18"/>
     <p:sldId id="270" r:id="rId19"/>
     <p:sldId id="271" r:id="rId20"/>
-    <p:sldId id="272" r:id="rId21"/>
-    <p:sldId id="273" r:id="rId22"/>
-    <p:sldId id="274" r:id="rId23"/>
-    <p:sldId id="275" r:id="rId24"/>
   </p:sldIdLst>
   <p:sldSz cy="6858000" cx="12192000"/>
   <p:notesSz cx="6858000" cy="9144000"/>
@@ -262,7 +258,7 @@
   </p:defaultTextStyle>
   <p:extLst>
     <p:ext uri="GoogleSlidesCustomDataVersion2">
-      <go:slidesCustomData xmlns:go="http://customooxmlschemas.google.com/" r:id="rId25" roundtripDataSignature="AMtx7mhIqWWYjgXgCEvKJdPPCHnJDtIBgA=="/>
+      <go:slidesCustomData xmlns:go="http://customooxmlschemas.google.com/" r:id="rId21" roundtripDataSignature="AMtx7mhGb+H2Tuw+6ZPH+RZG4MwAIKRRUA=="/>
     </p:ext>
   </p:extLst>
 </p:presentation>
@@ -972,7 +968,7 @@
       </p:grpSpPr>
       <p:sp>
         <p:nvSpPr>
-          <p:cNvPr id="170" name="Google Shape;170;g3885b867a7c_0_24:notes"/>
+          <p:cNvPr id="170" name="Google Shape;170;p8:notes"/>
           <p:cNvSpPr txBox="1"/>
           <p:nvPr>
             <p:ph idx="1" type="body"/>
@@ -1019,7 +1015,124 @@
       </p:sp>
       <p:sp>
         <p:nvSpPr>
-          <p:cNvPr id="171" name="Google Shape;171;g3885b867a7c_0_24:notes"/>
+          <p:cNvPr id="171" name="Google Shape;171;p8:notes"/>
+          <p:cNvSpPr/>
+          <p:nvPr>
+            <p:ph idx="2" type="sldImg"/>
+          </p:nvPr>
+        </p:nvSpPr>
+        <p:spPr>
+          <a:xfrm>
+            <a:off x="1143225" y="685800"/>
+            <a:ext cx="4572225" cy="3429000"/>
+          </a:xfrm>
+          <a:custGeom>
+            <a:rect b="b" l="l" r="r" t="t"/>
+            <a:pathLst>
+              <a:path extrusionOk="0" h="120000" w="120000">
+                <a:moveTo>
+                  <a:pt x="0" y="0"/>
+                </a:moveTo>
+                <a:lnTo>
+                  <a:pt x="120000" y="0"/>
+                </a:lnTo>
+                <a:lnTo>
+                  <a:pt x="120000" y="120000"/>
+                </a:lnTo>
+                <a:lnTo>
+                  <a:pt x="0" y="120000"/>
+                </a:lnTo>
+                <a:close/>
+              </a:path>
+            </a:pathLst>
+          </a:custGeom>
+          <a:noFill/>
+          <a:ln cap="flat" cmpd="sng" w="9525">
+            <a:solidFill>
+              <a:srgbClr val="000000"/>
+            </a:solidFill>
+            <a:prstDash val="solid"/>
+            <a:round/>
+            <a:headEnd len="sm" w="sm" type="none"/>
+            <a:tailEnd len="sm" w="sm" type="none"/>
+          </a:ln>
+        </p:spPr>
+      </p:sp>
+    </p:spTree>
+  </p:cSld>
+  <p:clrMapOvr>
+    <a:masterClrMapping/>
+  </p:clrMapOvr>
+</p:notes>
+</file>
+
+<file path=ppt/notesSlides/notesSlide11.xml><?xml version="1.0" encoding="utf-8"?>
+<p:notes xmlns:a="http://schemas.openxmlformats.org/drawingml/2006/main" xmlns:r="http://schemas.openxmlformats.org/officeDocument/2006/relationships" xmlns:mc="http://schemas.openxmlformats.org/markup-compatibility/2006" xmlns:mv="urn:schemas-microsoft-com:mac:vml" xmlns:p="http://schemas.openxmlformats.org/presentationml/2006/main" xmlns:c="http://schemas.openxmlformats.org/drawingml/2006/chart" xmlns:dgm="http://schemas.openxmlformats.org/drawingml/2006/diagram" xmlns:o="urn:schemas-microsoft-com:office:office" xmlns:v="urn:schemas-microsoft-com:vml" xmlns:pvml="urn:schemas-microsoft-com:office:powerpoint" xmlns:com="http://schemas.openxmlformats.org/drawingml/2006/compatibility" xmlns:p14="http://schemas.microsoft.com/office/powerpoint/2010/main" xmlns:p15="http://schemas.microsoft.com/office/powerpoint/2012/main" xmlns:ahyp="http://schemas.microsoft.com/office/drawing/2018/hyperlinkcolor" showMasterPhAnim="0" showMasterSp="0">
+  <p:cSld>
+    <p:spTree>
+      <p:nvGrpSpPr>
+        <p:cNvPr id="178" name="Shape 178"/>
+        <p:cNvGrpSpPr/>
+        <p:nvPr/>
+      </p:nvGrpSpPr>
+      <p:grpSpPr>
+        <a:xfrm>
+          <a:off x="0" y="0"/>
+          <a:ext cx="0" cy="0"/>
+          <a:chOff x="0" y="0"/>
+          <a:chExt cx="0" cy="0"/>
+        </a:xfrm>
+      </p:grpSpPr>
+      <p:sp>
+        <p:nvSpPr>
+          <p:cNvPr id="179" name="Google Shape;179;g3a1d312f352_0_11:notes"/>
+          <p:cNvSpPr txBox="1"/>
+          <p:nvPr>
+            <p:ph idx="1" type="body"/>
+          </p:nvPr>
+        </p:nvSpPr>
+        <p:spPr>
+          <a:xfrm>
+            <a:off x="685800" y="4343400"/>
+            <a:ext cx="5486400" cy="4114800"/>
+          </a:xfrm>
+          <a:prstGeom prst="rect">
+            <a:avLst/>
+          </a:prstGeom>
+          <a:noFill/>
+          <a:ln>
+            <a:noFill/>
+          </a:ln>
+        </p:spPr>
+        <p:txBody>
+          <a:bodyPr anchorCtr="0" anchor="t" bIns="91425" lIns="91425" spcFirstLastPara="1" rIns="91425" wrap="square" tIns="91425">
+            <a:noAutofit/>
+          </a:bodyPr>
+          <a:lstStyle/>
+          <a:p>
+            <a:pPr indent="0" lvl="0" marL="0" rtl="0" algn="l">
+              <a:lnSpc>
+                <a:spcPct val="100000"/>
+              </a:lnSpc>
+              <a:spcBef>
+                <a:spcPts val="0"/>
+              </a:spcBef>
+              <a:spcAft>
+                <a:spcPts val="0"/>
+              </a:spcAft>
+              <a:buSzPts val="1100"/>
+              <a:buNone/>
+            </a:pPr>
+            <a:r>
+              <a:t/>
+            </a:r>
+            <a:endParaRPr/>
+          </a:p>
+        </p:txBody>
+      </p:sp>
+      <p:sp>
+        <p:nvSpPr>
+          <p:cNvPr id="180" name="Google Shape;180;g3a1d312f352_0_11:notes"/>
           <p:cNvSpPr/>
           <p:nvPr>
             <p:ph idx="2" type="sldImg"/>
@@ -1070,12 +1183,12 @@
 </p:notes>
 </file>
 
-<file path=ppt/notesSlides/notesSlide11.xml><?xml version="1.0" encoding="utf-8"?>
+<file path=ppt/notesSlides/notesSlide12.xml><?xml version="1.0" encoding="utf-8"?>
 <p:notes xmlns:a="http://schemas.openxmlformats.org/drawingml/2006/main" xmlns:r="http://schemas.openxmlformats.org/officeDocument/2006/relationships" xmlns:mc="http://schemas.openxmlformats.org/markup-compatibility/2006" xmlns:mv="urn:schemas-microsoft-com:mac:vml" xmlns:p="http://schemas.openxmlformats.org/presentationml/2006/main" xmlns:c="http://schemas.openxmlformats.org/drawingml/2006/chart" xmlns:dgm="http://schemas.openxmlformats.org/drawingml/2006/diagram" xmlns:o="urn:schemas-microsoft-com:office:office" xmlns:v="urn:schemas-microsoft-com:vml" xmlns:pvml="urn:schemas-microsoft-com:office:powerpoint" xmlns:com="http://schemas.openxmlformats.org/drawingml/2006/compatibility" xmlns:p14="http://schemas.microsoft.com/office/powerpoint/2010/main" xmlns:p15="http://schemas.microsoft.com/office/powerpoint/2012/main" xmlns:ahyp="http://schemas.microsoft.com/office/drawing/2018/hyperlinkcolor" showMasterPhAnim="0" showMasterSp="0">
   <p:cSld>
     <p:spTree>
       <p:nvGrpSpPr>
-        <p:cNvPr id="179" name="Shape 179"/>
+        <p:cNvPr id="187" name="Shape 187"/>
         <p:cNvGrpSpPr/>
         <p:nvPr/>
       </p:nvGrpSpPr>
@@ -1089,7 +1202,7 @@
       </p:grpSpPr>
       <p:sp>
         <p:nvSpPr>
-          <p:cNvPr id="180" name="Google Shape;180;g388615e3470_0_2:notes"/>
+          <p:cNvPr id="188" name="Google Shape;188;p10:notes"/>
           <p:cNvSpPr txBox="1"/>
           <p:nvPr>
             <p:ph idx="1" type="body"/>
@@ -1136,124 +1249,7 @@
       </p:sp>
       <p:sp>
         <p:nvSpPr>
-          <p:cNvPr id="181" name="Google Shape;181;g388615e3470_0_2:notes"/>
-          <p:cNvSpPr/>
-          <p:nvPr>
-            <p:ph idx="2" type="sldImg"/>
-          </p:nvPr>
-        </p:nvSpPr>
-        <p:spPr>
-          <a:xfrm>
-            <a:off x="381000" y="685800"/>
-            <a:ext cx="6096000" cy="3429000"/>
-          </a:xfrm>
-          <a:custGeom>
-            <a:rect b="b" l="l" r="r" t="t"/>
-            <a:pathLst>
-              <a:path extrusionOk="0" h="120000" w="120000">
-                <a:moveTo>
-                  <a:pt x="0" y="0"/>
-                </a:moveTo>
-                <a:lnTo>
-                  <a:pt x="120000" y="0"/>
-                </a:lnTo>
-                <a:lnTo>
-                  <a:pt x="120000" y="120000"/>
-                </a:lnTo>
-                <a:lnTo>
-                  <a:pt x="0" y="120000"/>
-                </a:lnTo>
-                <a:close/>
-              </a:path>
-            </a:pathLst>
-          </a:custGeom>
-          <a:noFill/>
-          <a:ln cap="flat" cmpd="sng" w="9525">
-            <a:solidFill>
-              <a:srgbClr val="000000"/>
-            </a:solidFill>
-            <a:prstDash val="solid"/>
-            <a:round/>
-            <a:headEnd len="sm" w="sm" type="none"/>
-            <a:tailEnd len="sm" w="sm" type="none"/>
-          </a:ln>
-        </p:spPr>
-      </p:sp>
-    </p:spTree>
-  </p:cSld>
-  <p:clrMapOvr>
-    <a:masterClrMapping/>
-  </p:clrMapOvr>
-</p:notes>
-</file>
-
-<file path=ppt/notesSlides/notesSlide12.xml><?xml version="1.0" encoding="utf-8"?>
-<p:notes xmlns:a="http://schemas.openxmlformats.org/drawingml/2006/main" xmlns:r="http://schemas.openxmlformats.org/officeDocument/2006/relationships" xmlns:mc="http://schemas.openxmlformats.org/markup-compatibility/2006" xmlns:mv="urn:schemas-microsoft-com:mac:vml" xmlns:p="http://schemas.openxmlformats.org/presentationml/2006/main" xmlns:c="http://schemas.openxmlformats.org/drawingml/2006/chart" xmlns:dgm="http://schemas.openxmlformats.org/drawingml/2006/diagram" xmlns:o="urn:schemas-microsoft-com:office:office" xmlns:v="urn:schemas-microsoft-com:vml" xmlns:pvml="urn:schemas-microsoft-com:office:powerpoint" xmlns:com="http://schemas.openxmlformats.org/drawingml/2006/compatibility" xmlns:p14="http://schemas.microsoft.com/office/powerpoint/2010/main" xmlns:p15="http://schemas.microsoft.com/office/powerpoint/2012/main" xmlns:ahyp="http://schemas.microsoft.com/office/drawing/2018/hyperlinkcolor" showMasterPhAnim="0" showMasterSp="0">
-  <p:cSld>
-    <p:spTree>
-      <p:nvGrpSpPr>
-        <p:cNvPr id="188" name="Shape 188"/>
-        <p:cNvGrpSpPr/>
-        <p:nvPr/>
-      </p:nvGrpSpPr>
-      <p:grpSpPr>
-        <a:xfrm>
-          <a:off x="0" y="0"/>
-          <a:ext cx="0" cy="0"/>
-          <a:chOff x="0" y="0"/>
-          <a:chExt cx="0" cy="0"/>
-        </a:xfrm>
-      </p:grpSpPr>
-      <p:sp>
-        <p:nvSpPr>
-          <p:cNvPr id="189" name="Google Shape;189;p8:notes"/>
-          <p:cNvSpPr txBox="1"/>
-          <p:nvPr>
-            <p:ph idx="1" type="body"/>
-          </p:nvPr>
-        </p:nvSpPr>
-        <p:spPr>
-          <a:xfrm>
-            <a:off x="685800" y="4343400"/>
-            <a:ext cx="5486400" cy="4114800"/>
-          </a:xfrm>
-          <a:prstGeom prst="rect">
-            <a:avLst/>
-          </a:prstGeom>
-          <a:noFill/>
-          <a:ln>
-            <a:noFill/>
-          </a:ln>
-        </p:spPr>
-        <p:txBody>
-          <a:bodyPr anchorCtr="0" anchor="t" bIns="91425" lIns="91425" spcFirstLastPara="1" rIns="91425" wrap="square" tIns="91425">
-            <a:noAutofit/>
-          </a:bodyPr>
-          <a:lstStyle/>
-          <a:p>
-            <a:pPr indent="0" lvl="0" marL="0" rtl="0" algn="l">
-              <a:lnSpc>
-                <a:spcPct val="100000"/>
-              </a:lnSpc>
-              <a:spcBef>
-                <a:spcPts val="0"/>
-              </a:spcBef>
-              <a:spcAft>
-                <a:spcPts val="0"/>
-              </a:spcAft>
-              <a:buSzPts val="1100"/>
-              <a:buNone/>
-            </a:pPr>
-            <a:r>
-              <a:t/>
-            </a:r>
-            <a:endParaRPr/>
-          </a:p>
-        </p:txBody>
-      </p:sp>
-      <p:sp>
-        <p:nvSpPr>
-          <p:cNvPr id="190" name="Google Shape;190;p8:notes"/>
+          <p:cNvPr id="189" name="Google Shape;189;p10:notes"/>
           <p:cNvSpPr/>
           <p:nvPr>
             <p:ph idx="2" type="sldImg"/>
@@ -1309,7 +1305,7 @@
   <p:cSld>
     <p:spTree>
       <p:nvGrpSpPr>
-        <p:cNvPr id="197" name="Shape 197"/>
+        <p:cNvPr id="196" name="Shape 196"/>
         <p:cNvGrpSpPr/>
         <p:nvPr/>
       </p:nvGrpSpPr>
@@ -1323,7 +1319,7 @@
       </p:grpSpPr>
       <p:sp>
         <p:nvSpPr>
-          <p:cNvPr id="198" name="Google Shape;198;p9:notes"/>
+          <p:cNvPr id="197" name="Google Shape;197;p11:notes"/>
           <p:cNvSpPr txBox="1"/>
           <p:nvPr>
             <p:ph idx="1" type="body"/>
@@ -1370,7 +1366,7 @@
       </p:sp>
       <p:sp>
         <p:nvSpPr>
-          <p:cNvPr id="199" name="Google Shape;199;p9:notes"/>
+          <p:cNvPr id="198" name="Google Shape;198;p11:notes"/>
           <p:cNvSpPr/>
           <p:nvPr>
             <p:ph idx="2" type="sldImg"/>
@@ -1426,7 +1422,7 @@
   <p:cSld>
     <p:spTree>
       <p:nvGrpSpPr>
-        <p:cNvPr id="206" name="Shape 206"/>
+        <p:cNvPr id="202" name="Shape 202"/>
         <p:cNvGrpSpPr/>
         <p:nvPr/>
       </p:nvGrpSpPr>
@@ -1440,7 +1436,7 @@
       </p:grpSpPr>
       <p:sp>
         <p:nvSpPr>
-          <p:cNvPr id="207" name="Google Shape;207;g38db7480481_0_0:notes"/>
+          <p:cNvPr id="203" name="Google Shape;203;p12:notes"/>
           <p:cNvSpPr txBox="1"/>
           <p:nvPr>
             <p:ph idx="1" type="body"/>
@@ -1487,241 +1483,7 @@
       </p:sp>
       <p:sp>
         <p:nvSpPr>
-          <p:cNvPr id="208" name="Google Shape;208;g38db7480481_0_0:notes"/>
-          <p:cNvSpPr/>
-          <p:nvPr>
-            <p:ph idx="2" type="sldImg"/>
-          </p:nvPr>
-        </p:nvSpPr>
-        <p:spPr>
-          <a:xfrm>
-            <a:off x="1143225" y="685800"/>
-            <a:ext cx="4572300" cy="3429000"/>
-          </a:xfrm>
-          <a:custGeom>
-            <a:rect b="b" l="l" r="r" t="t"/>
-            <a:pathLst>
-              <a:path extrusionOk="0" h="120000" w="120000">
-                <a:moveTo>
-                  <a:pt x="0" y="0"/>
-                </a:moveTo>
-                <a:lnTo>
-                  <a:pt x="120000" y="0"/>
-                </a:lnTo>
-                <a:lnTo>
-                  <a:pt x="120000" y="120000"/>
-                </a:lnTo>
-                <a:lnTo>
-                  <a:pt x="0" y="120000"/>
-                </a:lnTo>
-                <a:close/>
-              </a:path>
-            </a:pathLst>
-          </a:custGeom>
-          <a:noFill/>
-          <a:ln cap="flat" cmpd="sng" w="9525">
-            <a:solidFill>
-              <a:srgbClr val="000000"/>
-            </a:solidFill>
-            <a:prstDash val="solid"/>
-            <a:round/>
-            <a:headEnd len="sm" w="sm" type="none"/>
-            <a:tailEnd len="sm" w="sm" type="none"/>
-          </a:ln>
-        </p:spPr>
-      </p:sp>
-    </p:spTree>
-  </p:cSld>
-  <p:clrMapOvr>
-    <a:masterClrMapping/>
-  </p:clrMapOvr>
-</p:notes>
-</file>
-
-<file path=ppt/notesSlides/notesSlide15.xml><?xml version="1.0" encoding="utf-8"?>
-<p:notes xmlns:a="http://schemas.openxmlformats.org/drawingml/2006/main" xmlns:r="http://schemas.openxmlformats.org/officeDocument/2006/relationships" xmlns:mc="http://schemas.openxmlformats.org/markup-compatibility/2006" xmlns:mv="urn:schemas-microsoft-com:mac:vml" xmlns:p="http://schemas.openxmlformats.org/presentationml/2006/main" xmlns:c="http://schemas.openxmlformats.org/drawingml/2006/chart" xmlns:dgm="http://schemas.openxmlformats.org/drawingml/2006/diagram" xmlns:o="urn:schemas-microsoft-com:office:office" xmlns:v="urn:schemas-microsoft-com:vml" xmlns:pvml="urn:schemas-microsoft-com:office:powerpoint" xmlns:com="http://schemas.openxmlformats.org/drawingml/2006/compatibility" xmlns:p14="http://schemas.microsoft.com/office/powerpoint/2010/main" xmlns:p15="http://schemas.microsoft.com/office/powerpoint/2012/main" xmlns:ahyp="http://schemas.microsoft.com/office/drawing/2018/hyperlinkcolor" showMasterPhAnim="0" showMasterSp="0">
-  <p:cSld>
-    <p:spTree>
-      <p:nvGrpSpPr>
-        <p:cNvPr id="214" name="Shape 214"/>
-        <p:cNvGrpSpPr/>
-        <p:nvPr/>
-      </p:nvGrpSpPr>
-      <p:grpSpPr>
-        <a:xfrm>
-          <a:off x="0" y="0"/>
-          <a:ext cx="0" cy="0"/>
-          <a:chOff x="0" y="0"/>
-          <a:chExt cx="0" cy="0"/>
-        </a:xfrm>
-      </p:grpSpPr>
-      <p:sp>
-        <p:nvSpPr>
-          <p:cNvPr id="215" name="Google Shape;215;g37beaa24df5_1_4:notes"/>
-          <p:cNvSpPr txBox="1"/>
-          <p:nvPr>
-            <p:ph idx="1" type="body"/>
-          </p:nvPr>
-        </p:nvSpPr>
-        <p:spPr>
-          <a:xfrm>
-            <a:off x="685800" y="4343400"/>
-            <a:ext cx="5486400" cy="4114800"/>
-          </a:xfrm>
-          <a:prstGeom prst="rect">
-            <a:avLst/>
-          </a:prstGeom>
-          <a:noFill/>
-          <a:ln>
-            <a:noFill/>
-          </a:ln>
-        </p:spPr>
-        <p:txBody>
-          <a:bodyPr anchorCtr="0" anchor="t" bIns="91425" lIns="91425" spcFirstLastPara="1" rIns="91425" wrap="square" tIns="91425">
-            <a:noAutofit/>
-          </a:bodyPr>
-          <a:lstStyle/>
-          <a:p>
-            <a:pPr indent="0" lvl="0" marL="0" rtl="0" algn="l">
-              <a:lnSpc>
-                <a:spcPct val="100000"/>
-              </a:lnSpc>
-              <a:spcBef>
-                <a:spcPts val="0"/>
-              </a:spcBef>
-              <a:spcAft>
-                <a:spcPts val="0"/>
-              </a:spcAft>
-              <a:buSzPts val="1100"/>
-              <a:buNone/>
-            </a:pPr>
-            <a:r>
-              <a:t/>
-            </a:r>
-            <a:endParaRPr/>
-          </a:p>
-        </p:txBody>
-      </p:sp>
-      <p:sp>
-        <p:nvSpPr>
-          <p:cNvPr id="216" name="Google Shape;216;g37beaa24df5_1_4:notes"/>
-          <p:cNvSpPr/>
-          <p:nvPr>
-            <p:ph idx="2" type="sldImg"/>
-          </p:nvPr>
-        </p:nvSpPr>
-        <p:spPr>
-          <a:xfrm>
-            <a:off x="1143225" y="685800"/>
-            <a:ext cx="4572300" cy="3429000"/>
-          </a:xfrm>
-          <a:custGeom>
-            <a:rect b="b" l="l" r="r" t="t"/>
-            <a:pathLst>
-              <a:path extrusionOk="0" h="120000" w="120000">
-                <a:moveTo>
-                  <a:pt x="0" y="0"/>
-                </a:moveTo>
-                <a:lnTo>
-                  <a:pt x="120000" y="0"/>
-                </a:lnTo>
-                <a:lnTo>
-                  <a:pt x="120000" y="120000"/>
-                </a:lnTo>
-                <a:lnTo>
-                  <a:pt x="0" y="120000"/>
-                </a:lnTo>
-                <a:close/>
-              </a:path>
-            </a:pathLst>
-          </a:custGeom>
-          <a:noFill/>
-          <a:ln cap="flat" cmpd="sng" w="9525">
-            <a:solidFill>
-              <a:srgbClr val="000000"/>
-            </a:solidFill>
-            <a:prstDash val="solid"/>
-            <a:round/>
-            <a:headEnd len="sm" w="sm" type="none"/>
-            <a:tailEnd len="sm" w="sm" type="none"/>
-          </a:ln>
-        </p:spPr>
-      </p:sp>
-    </p:spTree>
-  </p:cSld>
-  <p:clrMapOvr>
-    <a:masterClrMapping/>
-  </p:clrMapOvr>
-</p:notes>
-</file>
-
-<file path=ppt/notesSlides/notesSlide16.xml><?xml version="1.0" encoding="utf-8"?>
-<p:notes xmlns:a="http://schemas.openxmlformats.org/drawingml/2006/main" xmlns:r="http://schemas.openxmlformats.org/officeDocument/2006/relationships" xmlns:mc="http://schemas.openxmlformats.org/markup-compatibility/2006" xmlns:mv="urn:schemas-microsoft-com:mac:vml" xmlns:p="http://schemas.openxmlformats.org/presentationml/2006/main" xmlns:c="http://schemas.openxmlformats.org/drawingml/2006/chart" xmlns:dgm="http://schemas.openxmlformats.org/drawingml/2006/diagram" xmlns:o="urn:schemas-microsoft-com:office:office" xmlns:v="urn:schemas-microsoft-com:vml" xmlns:pvml="urn:schemas-microsoft-com:office:powerpoint" xmlns:com="http://schemas.openxmlformats.org/drawingml/2006/compatibility" xmlns:p14="http://schemas.microsoft.com/office/powerpoint/2010/main" xmlns:p15="http://schemas.microsoft.com/office/powerpoint/2012/main" xmlns:ahyp="http://schemas.microsoft.com/office/drawing/2018/hyperlinkcolor" showMasterPhAnim="0" showMasterSp="0">
-  <p:cSld>
-    <p:spTree>
-      <p:nvGrpSpPr>
-        <p:cNvPr id="222" name="Shape 222"/>
-        <p:cNvGrpSpPr/>
-        <p:nvPr/>
-      </p:nvGrpSpPr>
-      <p:grpSpPr>
-        <a:xfrm>
-          <a:off x="0" y="0"/>
-          <a:ext cx="0" cy="0"/>
-          <a:chOff x="0" y="0"/>
-          <a:chExt cx="0" cy="0"/>
-        </a:xfrm>
-      </p:grpSpPr>
-      <p:sp>
-        <p:nvSpPr>
-          <p:cNvPr id="223" name="Google Shape;223;p14:notes"/>
-          <p:cNvSpPr txBox="1"/>
-          <p:nvPr>
-            <p:ph idx="1" type="body"/>
-          </p:nvPr>
-        </p:nvSpPr>
-        <p:spPr>
-          <a:xfrm>
-            <a:off x="685800" y="4343400"/>
-            <a:ext cx="5486400" cy="4114800"/>
-          </a:xfrm>
-          <a:prstGeom prst="rect">
-            <a:avLst/>
-          </a:prstGeom>
-          <a:noFill/>
-          <a:ln>
-            <a:noFill/>
-          </a:ln>
-        </p:spPr>
-        <p:txBody>
-          <a:bodyPr anchorCtr="0" anchor="t" bIns="91425" lIns="91425" spcFirstLastPara="1" rIns="91425" wrap="square" tIns="91425">
-            <a:noAutofit/>
-          </a:bodyPr>
-          <a:lstStyle/>
-          <a:p>
-            <a:pPr indent="0" lvl="0" marL="0" rtl="0" algn="l">
-              <a:lnSpc>
-                <a:spcPct val="100000"/>
-              </a:lnSpc>
-              <a:spcBef>
-                <a:spcPts val="0"/>
-              </a:spcBef>
-              <a:spcAft>
-                <a:spcPts val="0"/>
-              </a:spcAft>
-              <a:buSzPts val="1100"/>
-              <a:buNone/>
-            </a:pPr>
-            <a:r>
-              <a:t/>
-            </a:r>
-            <a:endParaRPr/>
-          </a:p>
-        </p:txBody>
-      </p:sp>
-      <p:sp>
-        <p:nvSpPr>
-          <p:cNvPr id="224" name="Google Shape;224;p14:notes"/>
+          <p:cNvPr id="204" name="Google Shape;204;p12:notes"/>
           <p:cNvSpPr/>
           <p:nvPr>
             <p:ph idx="2" type="sldImg"/>
@@ -1772,12 +1534,12 @@
 </p:notes>
 </file>
 
-<file path=ppt/notesSlides/notesSlide17.xml><?xml version="1.0" encoding="utf-8"?>
+<file path=ppt/notesSlides/notesSlide15.xml><?xml version="1.0" encoding="utf-8"?>
 <p:notes xmlns:a="http://schemas.openxmlformats.org/drawingml/2006/main" xmlns:r="http://schemas.openxmlformats.org/officeDocument/2006/relationships" xmlns:mc="http://schemas.openxmlformats.org/markup-compatibility/2006" xmlns:mv="urn:schemas-microsoft-com:mac:vml" xmlns:p="http://schemas.openxmlformats.org/presentationml/2006/main" xmlns:c="http://schemas.openxmlformats.org/drawingml/2006/chart" xmlns:dgm="http://schemas.openxmlformats.org/drawingml/2006/diagram" xmlns:o="urn:schemas-microsoft-com:office:office" xmlns:v="urn:schemas-microsoft-com:vml" xmlns:pvml="urn:schemas-microsoft-com:office:powerpoint" xmlns:com="http://schemas.openxmlformats.org/drawingml/2006/compatibility" xmlns:p14="http://schemas.microsoft.com/office/powerpoint/2010/main" xmlns:p15="http://schemas.microsoft.com/office/powerpoint/2012/main" xmlns:ahyp="http://schemas.microsoft.com/office/drawing/2018/hyperlinkcolor" showMasterPhAnim="0" showMasterSp="0">
   <p:cSld>
     <p:spTree>
       <p:nvGrpSpPr>
-        <p:cNvPr id="228" name="Shape 228"/>
+        <p:cNvPr id="209" name="Shape 209"/>
         <p:cNvGrpSpPr/>
         <p:nvPr/>
       </p:nvGrpSpPr>
@@ -1791,7 +1553,7 @@
       </p:grpSpPr>
       <p:sp>
         <p:nvSpPr>
-          <p:cNvPr id="229" name="Google Shape;229;p10:notes"/>
+          <p:cNvPr id="210" name="Google Shape;210;p13:notes"/>
           <p:cNvSpPr txBox="1"/>
           <p:nvPr>
             <p:ph idx="1" type="body"/>
@@ -1838,7 +1600,7 @@
       </p:sp>
       <p:sp>
         <p:nvSpPr>
-          <p:cNvPr id="230" name="Google Shape;230;p10:notes"/>
+          <p:cNvPr id="211" name="Google Shape;211;p13:notes"/>
           <p:cNvSpPr/>
           <p:nvPr>
             <p:ph idx="2" type="sldImg"/>
@@ -1889,12 +1651,12 @@
 </p:notes>
 </file>
 
-<file path=ppt/notesSlides/notesSlide18.xml><?xml version="1.0" encoding="utf-8"?>
+<file path=ppt/notesSlides/notesSlide16.xml><?xml version="1.0" encoding="utf-8"?>
 <p:notes xmlns:a="http://schemas.openxmlformats.org/drawingml/2006/main" xmlns:r="http://schemas.openxmlformats.org/officeDocument/2006/relationships" xmlns:mc="http://schemas.openxmlformats.org/markup-compatibility/2006" xmlns:mv="urn:schemas-microsoft-com:mac:vml" xmlns:p="http://schemas.openxmlformats.org/presentationml/2006/main" xmlns:c="http://schemas.openxmlformats.org/drawingml/2006/chart" xmlns:dgm="http://schemas.openxmlformats.org/drawingml/2006/diagram" xmlns:o="urn:schemas-microsoft-com:office:office" xmlns:v="urn:schemas-microsoft-com:vml" xmlns:pvml="urn:schemas-microsoft-com:office:powerpoint" xmlns:com="http://schemas.openxmlformats.org/drawingml/2006/compatibility" xmlns:p14="http://schemas.microsoft.com/office/powerpoint/2010/main" xmlns:p15="http://schemas.microsoft.com/office/powerpoint/2012/main" xmlns:ahyp="http://schemas.microsoft.com/office/drawing/2018/hyperlinkcolor" showMasterPhAnim="0" showMasterSp="0">
   <p:cSld>
     <p:spTree>
       <p:nvGrpSpPr>
-        <p:cNvPr id="236" name="Shape 236"/>
+        <p:cNvPr id="217" name="Shape 217"/>
         <p:cNvGrpSpPr/>
         <p:nvPr/>
       </p:nvGrpSpPr>
@@ -1908,7 +1670,7 @@
       </p:grpSpPr>
       <p:sp>
         <p:nvSpPr>
-          <p:cNvPr id="237" name="Google Shape;237;p11:notes"/>
+          <p:cNvPr id="218" name="Google Shape;218;g39d40bac61c_0_37:notes"/>
           <p:cNvSpPr txBox="1"/>
           <p:nvPr>
             <p:ph idx="1" type="body"/>
@@ -1955,7 +1717,7 @@
       </p:sp>
       <p:sp>
         <p:nvSpPr>
-          <p:cNvPr id="238" name="Google Shape;238;p11:notes"/>
+          <p:cNvPr id="219" name="Google Shape;219;g39d40bac61c_0_37:notes"/>
           <p:cNvSpPr/>
           <p:nvPr>
             <p:ph idx="2" type="sldImg"/>
@@ -1964,124 +1726,7 @@
         <p:spPr>
           <a:xfrm>
             <a:off x="1143225" y="685800"/>
-            <a:ext cx="4572225" cy="3429000"/>
-          </a:xfrm>
-          <a:custGeom>
-            <a:rect b="b" l="l" r="r" t="t"/>
-            <a:pathLst>
-              <a:path extrusionOk="0" h="120000" w="120000">
-                <a:moveTo>
-                  <a:pt x="0" y="0"/>
-                </a:moveTo>
-                <a:lnTo>
-                  <a:pt x="120000" y="0"/>
-                </a:lnTo>
-                <a:lnTo>
-                  <a:pt x="120000" y="120000"/>
-                </a:lnTo>
-                <a:lnTo>
-                  <a:pt x="0" y="120000"/>
-                </a:lnTo>
-                <a:close/>
-              </a:path>
-            </a:pathLst>
-          </a:custGeom>
-          <a:noFill/>
-          <a:ln cap="flat" cmpd="sng" w="9525">
-            <a:solidFill>
-              <a:srgbClr val="000000"/>
-            </a:solidFill>
-            <a:prstDash val="solid"/>
-            <a:round/>
-            <a:headEnd len="sm" w="sm" type="none"/>
-            <a:tailEnd len="sm" w="sm" type="none"/>
-          </a:ln>
-        </p:spPr>
-      </p:sp>
-    </p:spTree>
-  </p:cSld>
-  <p:clrMapOvr>
-    <a:masterClrMapping/>
-  </p:clrMapOvr>
-</p:notes>
-</file>
-
-<file path=ppt/notesSlides/notesSlide19.xml><?xml version="1.0" encoding="utf-8"?>
-<p:notes xmlns:a="http://schemas.openxmlformats.org/drawingml/2006/main" xmlns:r="http://schemas.openxmlformats.org/officeDocument/2006/relationships" xmlns:mc="http://schemas.openxmlformats.org/markup-compatibility/2006" xmlns:mv="urn:schemas-microsoft-com:mac:vml" xmlns:p="http://schemas.openxmlformats.org/presentationml/2006/main" xmlns:c="http://schemas.openxmlformats.org/drawingml/2006/chart" xmlns:dgm="http://schemas.openxmlformats.org/drawingml/2006/diagram" xmlns:o="urn:schemas-microsoft-com:office:office" xmlns:v="urn:schemas-microsoft-com:vml" xmlns:pvml="urn:schemas-microsoft-com:office:powerpoint" xmlns:com="http://schemas.openxmlformats.org/drawingml/2006/compatibility" xmlns:p14="http://schemas.microsoft.com/office/powerpoint/2010/main" xmlns:p15="http://schemas.microsoft.com/office/powerpoint/2012/main" xmlns:ahyp="http://schemas.microsoft.com/office/drawing/2018/hyperlinkcolor" showMasterPhAnim="0" showMasterSp="0">
-  <p:cSld>
-    <p:spTree>
-      <p:nvGrpSpPr>
-        <p:cNvPr id="242" name="Shape 242"/>
-        <p:cNvGrpSpPr/>
-        <p:nvPr/>
-      </p:nvGrpSpPr>
-      <p:grpSpPr>
-        <a:xfrm>
-          <a:off x="0" y="0"/>
-          <a:ext cx="0" cy="0"/>
-          <a:chOff x="0" y="0"/>
-          <a:chExt cx="0" cy="0"/>
-        </a:xfrm>
-      </p:grpSpPr>
-      <p:sp>
-        <p:nvSpPr>
-          <p:cNvPr id="243" name="Google Shape;243;p12:notes"/>
-          <p:cNvSpPr txBox="1"/>
-          <p:nvPr>
-            <p:ph idx="1" type="body"/>
-          </p:nvPr>
-        </p:nvSpPr>
-        <p:spPr>
-          <a:xfrm>
-            <a:off x="685800" y="4343400"/>
-            <a:ext cx="5486400" cy="4114800"/>
-          </a:xfrm>
-          <a:prstGeom prst="rect">
-            <a:avLst/>
-          </a:prstGeom>
-          <a:noFill/>
-          <a:ln>
-            <a:noFill/>
-          </a:ln>
-        </p:spPr>
-        <p:txBody>
-          <a:bodyPr anchorCtr="0" anchor="t" bIns="91425" lIns="91425" spcFirstLastPara="1" rIns="91425" wrap="square" tIns="91425">
-            <a:noAutofit/>
-          </a:bodyPr>
-          <a:lstStyle/>
-          <a:p>
-            <a:pPr indent="0" lvl="0" marL="0" rtl="0" algn="l">
-              <a:lnSpc>
-                <a:spcPct val="100000"/>
-              </a:lnSpc>
-              <a:spcBef>
-                <a:spcPts val="0"/>
-              </a:spcBef>
-              <a:spcAft>
-                <a:spcPts val="0"/>
-              </a:spcAft>
-              <a:buSzPts val="1100"/>
-              <a:buNone/>
-            </a:pPr>
-            <a:r>
-              <a:t/>
-            </a:r>
-            <a:endParaRPr/>
-          </a:p>
-        </p:txBody>
-      </p:sp>
-      <p:sp>
-        <p:nvSpPr>
-          <p:cNvPr id="244" name="Google Shape;244;p12:notes"/>
-          <p:cNvSpPr/>
-          <p:nvPr>
-            <p:ph idx="2" type="sldImg"/>
-          </p:nvPr>
-        </p:nvSpPr>
-        <p:spPr>
-          <a:xfrm>
-            <a:off x="1143225" y="685800"/>
-            <a:ext cx="4572225" cy="3429000"/>
+            <a:ext cx="4572300" cy="3429000"/>
           </a:xfrm>
           <a:custGeom>
             <a:rect b="b" l="l" r="r" t="t"/>
@@ -2190,123 +1835,6 @@
       <p:sp>
         <p:nvSpPr>
           <p:cNvPr id="88" name="Google Shape;88;p2:notes"/>
-          <p:cNvSpPr/>
-          <p:nvPr>
-            <p:ph idx="2" type="sldImg"/>
-          </p:nvPr>
-        </p:nvSpPr>
-        <p:spPr>
-          <a:xfrm>
-            <a:off x="1143225" y="685800"/>
-            <a:ext cx="4572225" cy="3429000"/>
-          </a:xfrm>
-          <a:custGeom>
-            <a:rect b="b" l="l" r="r" t="t"/>
-            <a:pathLst>
-              <a:path extrusionOk="0" h="120000" w="120000">
-                <a:moveTo>
-                  <a:pt x="0" y="0"/>
-                </a:moveTo>
-                <a:lnTo>
-                  <a:pt x="120000" y="0"/>
-                </a:lnTo>
-                <a:lnTo>
-                  <a:pt x="120000" y="120000"/>
-                </a:lnTo>
-                <a:lnTo>
-                  <a:pt x="0" y="120000"/>
-                </a:lnTo>
-                <a:close/>
-              </a:path>
-            </a:pathLst>
-          </a:custGeom>
-          <a:noFill/>
-          <a:ln cap="flat" cmpd="sng" w="9525">
-            <a:solidFill>
-              <a:srgbClr val="000000"/>
-            </a:solidFill>
-            <a:prstDash val="solid"/>
-            <a:round/>
-            <a:headEnd len="sm" w="sm" type="none"/>
-            <a:tailEnd len="sm" w="sm" type="none"/>
-          </a:ln>
-        </p:spPr>
-      </p:sp>
-    </p:spTree>
-  </p:cSld>
-  <p:clrMapOvr>
-    <a:masterClrMapping/>
-  </p:clrMapOvr>
-</p:notes>
-</file>
-
-<file path=ppt/notesSlides/notesSlide20.xml><?xml version="1.0" encoding="utf-8"?>
-<p:notes xmlns:a="http://schemas.openxmlformats.org/drawingml/2006/main" xmlns:r="http://schemas.openxmlformats.org/officeDocument/2006/relationships" xmlns:mc="http://schemas.openxmlformats.org/markup-compatibility/2006" xmlns:mv="urn:schemas-microsoft-com:mac:vml" xmlns:p="http://schemas.openxmlformats.org/presentationml/2006/main" xmlns:c="http://schemas.openxmlformats.org/drawingml/2006/chart" xmlns:dgm="http://schemas.openxmlformats.org/drawingml/2006/diagram" xmlns:o="urn:schemas-microsoft-com:office:office" xmlns:v="urn:schemas-microsoft-com:vml" xmlns:pvml="urn:schemas-microsoft-com:office:powerpoint" xmlns:com="http://schemas.openxmlformats.org/drawingml/2006/compatibility" xmlns:p14="http://schemas.microsoft.com/office/powerpoint/2010/main" xmlns:p15="http://schemas.microsoft.com/office/powerpoint/2012/main" xmlns:ahyp="http://schemas.microsoft.com/office/drawing/2018/hyperlinkcolor" showMasterPhAnim="0" showMasterSp="0">
-  <p:cSld>
-    <p:spTree>
-      <p:nvGrpSpPr>
-        <p:cNvPr id="248" name="Shape 248"/>
-        <p:cNvGrpSpPr/>
-        <p:nvPr/>
-      </p:nvGrpSpPr>
-      <p:grpSpPr>
-        <a:xfrm>
-          <a:off x="0" y="0"/>
-          <a:ext cx="0" cy="0"/>
-          <a:chOff x="0" y="0"/>
-          <a:chExt cx="0" cy="0"/>
-        </a:xfrm>
-      </p:grpSpPr>
-      <p:sp>
-        <p:nvSpPr>
-          <p:cNvPr id="249" name="Google Shape;249;p13:notes"/>
-          <p:cNvSpPr txBox="1"/>
-          <p:nvPr>
-            <p:ph idx="1" type="body"/>
-          </p:nvPr>
-        </p:nvSpPr>
-        <p:spPr>
-          <a:xfrm>
-            <a:off x="685800" y="4343400"/>
-            <a:ext cx="5486400" cy="4114800"/>
-          </a:xfrm>
-          <a:prstGeom prst="rect">
-            <a:avLst/>
-          </a:prstGeom>
-          <a:noFill/>
-          <a:ln>
-            <a:noFill/>
-          </a:ln>
-        </p:spPr>
-        <p:txBody>
-          <a:bodyPr anchorCtr="0" anchor="t" bIns="91425" lIns="91425" spcFirstLastPara="1" rIns="91425" wrap="square" tIns="91425">
-            <a:noAutofit/>
-          </a:bodyPr>
-          <a:lstStyle/>
-          <a:p>
-            <a:pPr indent="0" lvl="0" marL="0" rtl="0" algn="l">
-              <a:lnSpc>
-                <a:spcPct val="100000"/>
-              </a:lnSpc>
-              <a:spcBef>
-                <a:spcPts val="0"/>
-              </a:spcBef>
-              <a:spcAft>
-                <a:spcPts val="0"/>
-              </a:spcAft>
-              <a:buSzPts val="1100"/>
-              <a:buNone/>
-            </a:pPr>
-            <a:r>
-              <a:t/>
-            </a:r>
-            <a:endParaRPr/>
-          </a:p>
-        </p:txBody>
-      </p:sp>
-      <p:sp>
-        <p:nvSpPr>
-          <p:cNvPr id="250" name="Google Shape;250;p13:notes"/>
           <p:cNvSpPr/>
           <p:nvPr>
             <p:ph idx="2" type="sldImg"/>
@@ -2947,7 +2475,7 @@
   <p:cSld>
     <p:spTree>
       <p:nvGrpSpPr>
-        <p:cNvPr id="151" name="Shape 151"/>
+        <p:cNvPr id="150" name="Shape 150"/>
         <p:cNvGrpSpPr/>
         <p:nvPr/>
       </p:nvGrpSpPr>
@@ -2961,7 +2489,7 @@
       </p:grpSpPr>
       <p:sp>
         <p:nvSpPr>
-          <p:cNvPr id="152" name="Google Shape;152;g37df52e5cc3_0_0:notes"/>
+          <p:cNvPr id="151" name="Google Shape;151;g3885b867a7c_0_32:notes"/>
           <p:cNvSpPr txBox="1"/>
           <p:nvPr>
             <p:ph idx="1" type="body"/>
@@ -3008,7 +2536,7 @@
       </p:sp>
       <p:sp>
         <p:nvSpPr>
-          <p:cNvPr id="153" name="Google Shape;153;g37df52e5cc3_0_0:notes"/>
+          <p:cNvPr id="152" name="Google Shape;152;g3885b867a7c_0_32:notes"/>
           <p:cNvSpPr/>
           <p:nvPr>
             <p:ph idx="2" type="sldImg"/>
@@ -3064,7 +2592,7 @@
   <p:cSld>
     <p:spTree>
       <p:nvGrpSpPr>
-        <p:cNvPr id="160" name="Shape 160"/>
+        <p:cNvPr id="159" name="Shape 159"/>
         <p:cNvGrpSpPr/>
         <p:nvPr/>
       </p:nvGrpSpPr>
@@ -3078,7 +2606,7 @@
       </p:grpSpPr>
       <p:sp>
         <p:nvSpPr>
-          <p:cNvPr id="161" name="Google Shape;161;g3885b867a7c_0_32:notes"/>
+          <p:cNvPr id="160" name="Google Shape;160;g3885b867a7c_0_24:notes"/>
           <p:cNvSpPr txBox="1"/>
           <p:nvPr>
             <p:ph idx="1" type="body"/>
@@ -3125,7 +2653,7 @@
       </p:sp>
       <p:sp>
         <p:nvSpPr>
-          <p:cNvPr id="162" name="Google Shape;162;g3885b867a7c_0_32:notes"/>
+          <p:cNvPr id="161" name="Google Shape;161;g3885b867a7c_0_24:notes"/>
           <p:cNvSpPr/>
           <p:nvPr>
             <p:ph idx="2" type="sldImg"/>
@@ -16339,16 +15867,24 @@
                 <a:cs typeface="Calibri"/>
                 <a:sym typeface="Calibri"/>
               </a:rPr>
-              <a:t> Reparte+</a:t>
+              <a:t> </a:t>
             </a:r>
-            <a:endParaRPr b="0" i="0" sz="2200" u="none" cap="none" strike="noStrike">
+            <a:r>
+              <a:rPr b="1" i="0" lang="es-MX" sz="5200" u="none" cap="none" strike="noStrike">
+                <a:solidFill>
+                  <a:schemeClr val="dk1"/>
+                </a:solidFill>
+                <a:latin typeface="Calibri"/>
+                <a:ea typeface="Calibri"/>
+                <a:cs typeface="Calibri"/>
+                <a:sym typeface="Calibri"/>
+              </a:rPr>
+              <a:t>Reparte+</a:t>
+            </a:r>
+            <a:endParaRPr b="1" i="0" sz="2200" u="none" cap="none" strike="noStrike">
               <a:solidFill>
                 <a:srgbClr val="000000"/>
               </a:solidFill>
-              <a:latin typeface="Arial"/>
-              <a:ea typeface="Arial"/>
-              <a:cs typeface="Arial"/>
-              <a:sym typeface="Arial"/>
             </a:endParaRPr>
           </a:p>
           <a:p>
@@ -16370,7 +15906,7 @@
               <a:buNone/>
             </a:pPr>
             <a:r>
-              <a:rPr b="0" i="0" lang="es-MX" sz="3200" u="none" cap="none" strike="noStrike">
+              <a:rPr i="0" lang="es-MX" sz="3200" u="none" cap="none" strike="noStrike">
                 <a:solidFill>
                   <a:schemeClr val="dk1"/>
                 </a:solidFill>
@@ -16381,7 +15917,7 @@
               </a:rPr>
               <a:t>PRESENTACIÓN FASE 2 CAPSTONE</a:t>
             </a:r>
-            <a:endParaRPr b="0" i="0" sz="3200" u="none" cap="none" strike="noStrike">
+            <a:endParaRPr i="0" sz="3200" u="none" cap="none" strike="noStrike">
               <a:solidFill>
                 <a:schemeClr val="dk1"/>
               </a:solidFill>
@@ -16450,7 +15986,7 @@
       </p:grpSpPr>
       <p:pic>
         <p:nvPicPr>
-          <p:cNvPr descr="EscuelaIT Duoc UC - Escuela de Informática y Telecomunicaciones Duoc UC - Duoc  UC | LinkedIn" id="173" name="Google Shape;173;g3885b867a7c_0_24"/>
+          <p:cNvPr descr="EscuelaIT Duoc UC - Escuela de Informática y Telecomunicaciones Duoc UC - Duoc  UC | LinkedIn" id="173" name="Google Shape;173;p8"/>
           <p:cNvPicPr preferRelativeResize="0"/>
           <p:nvPr/>
         </p:nvPicPr>
@@ -16477,7 +16013,7 @@
       </p:pic>
       <p:sp>
         <p:nvSpPr>
-          <p:cNvPr id="174" name="Google Shape;174;g3885b867a7c_0_24"/>
+          <p:cNvPr id="174" name="Google Shape;174;p8"/>
           <p:cNvSpPr txBox="1"/>
           <p:nvPr/>
         </p:nvSpPr>
@@ -16543,14 +16079,14 @@
       </p:sp>
       <p:sp>
         <p:nvSpPr>
-          <p:cNvPr id="175" name="Google Shape;175;g3885b867a7c_0_24"/>
+          <p:cNvPr id="175" name="Google Shape;175;p8"/>
           <p:cNvSpPr txBox="1"/>
           <p:nvPr/>
         </p:nvSpPr>
         <p:spPr>
           <a:xfrm>
-            <a:off x="-29225" y="1054430"/>
-            <a:ext cx="12192000" cy="646500"/>
+            <a:off x="-278450" y="368930"/>
+            <a:ext cx="12192000" cy="861900"/>
           </a:xfrm>
           <a:prstGeom prst="rect">
             <a:avLst/>
@@ -16593,29 +16129,60 @@
                 <a:cs typeface="Calibri"/>
                 <a:sym typeface="Calibri"/>
               </a:rPr>
-              <a:t>Release Plan</a:t>
+              <a:t>Arquitectura del software</a:t>
             </a:r>
-            <a:endParaRPr b="0" i="0" sz="3600" u="none" cap="none" strike="noStrike">
+            <a:endParaRPr b="0" i="0" sz="1400" u="none" cap="none" strike="noStrike">
               <a:solidFill>
-                <a:schemeClr val="dk1"/>
+                <a:srgbClr val="000000"/>
               </a:solidFill>
-              <a:latin typeface="Calibri"/>
-              <a:ea typeface="Calibri"/>
-              <a:cs typeface="Calibri"/>
-              <a:sym typeface="Calibri"/>
+              <a:latin typeface="Arial"/>
+              <a:ea typeface="Arial"/>
+              <a:cs typeface="Arial"/>
+              <a:sym typeface="Arial"/>
+            </a:endParaRPr>
+          </a:p>
+          <a:p>
+            <a:pPr indent="0" lvl="0" marL="0" marR="0" rtl="0" algn="ctr">
+              <a:lnSpc>
+                <a:spcPct val="100000"/>
+              </a:lnSpc>
+              <a:spcBef>
+                <a:spcPts val="0"/>
+              </a:spcBef>
+              <a:spcAft>
+                <a:spcPts val="0"/>
+              </a:spcAft>
+              <a:buClr>
+                <a:srgbClr val="000000"/>
+              </a:buClr>
+              <a:buSzPts val="1400"/>
+              <a:buFont typeface="Arial"/>
+              <a:buNone/>
+            </a:pPr>
+            <a:r>
+              <a:t/>
+            </a:r>
+            <a:endParaRPr b="0" i="0" sz="1400" u="none" cap="none" strike="noStrike">
+              <a:solidFill>
+                <a:srgbClr val="000000"/>
+              </a:solidFill>
+              <a:latin typeface="Arial"/>
+              <a:ea typeface="Arial"/>
+              <a:cs typeface="Arial"/>
+              <a:sym typeface="Arial"/>
             </a:endParaRPr>
           </a:p>
         </p:txBody>
       </p:sp>
       <p:cxnSp>
         <p:nvCxnSpPr>
-          <p:cNvPr id="176" name="Google Shape;176;g3885b867a7c_0_24"/>
+          <p:cNvPr id="176" name="Google Shape;176;p8"/>
           <p:cNvCxnSpPr/>
           <p:nvPr/>
         </p:nvCxnSpPr>
         <p:spPr>
           <a:xfrm>
-            <a:off x="0" y="758027"/>
+            <a:off x="217825" y="901527"/>
             <a:ext cx="4085700" cy="0"/>
           </a:xfrm>
           <a:prstGeom prst="straightConnector1">
@@ -16635,7 +16202,7 @@
       </p:cxnSp>
       <p:pic>
         <p:nvPicPr>
-          <p:cNvPr id="177" name="Google Shape;177;g3885b867a7c_0_24" title="3.jpg"/>
+          <p:cNvPr id="177" name="Google Shape;177;p8" title="Reparte+.drawio.png"/>
           <p:cNvPicPr preferRelativeResize="0"/>
           <p:nvPr/>
         </p:nvPicPr>
@@ -16649,55 +16216,15 @@
         </p:blipFill>
         <p:spPr>
           <a:xfrm>
-            <a:off x="136200" y="1986230"/>
-            <a:ext cx="5857598" cy="3294899"/>
+            <a:off x="1296850" y="1101425"/>
+            <a:ext cx="9302148" cy="5564750"/>
           </a:xfrm>
           <a:prstGeom prst="rect">
             <a:avLst/>
           </a:prstGeom>
           <a:noFill/>
-          <a:ln cap="flat" cmpd="sng" w="9525">
-            <a:solidFill>
-              <a:schemeClr val="dk2"/>
-            </a:solidFill>
-            <a:prstDash val="solid"/>
-            <a:round/>
-            <a:headEnd len="sm" w="sm" type="none"/>
-            <a:tailEnd len="sm" w="sm" type="none"/>
-          </a:ln>
-        </p:spPr>
-      </p:pic>
-      <p:pic>
-        <p:nvPicPr>
-          <p:cNvPr id="178" name="Google Shape;178;g3885b867a7c_0_24" title="4.jpg"/>
-          <p:cNvPicPr preferRelativeResize="0"/>
-          <p:nvPr/>
-        </p:nvPicPr>
-        <p:blipFill>
-          <a:blip r:embed="rId5">
-            <a:alphaModFix/>
-          </a:blip>
-          <a:stretch>
-            <a:fillRect/>
-          </a:stretch>
-        </p:blipFill>
-        <p:spPr>
-          <a:xfrm>
-            <a:off x="6182198" y="1986230"/>
-            <a:ext cx="5893402" cy="3315038"/>
-          </a:xfrm>
-          <a:prstGeom prst="rect">
-            <a:avLst/>
-          </a:prstGeom>
-          <a:noFill/>
-          <a:ln cap="flat" cmpd="sng" w="9525">
-            <a:solidFill>
-              <a:schemeClr val="dk2"/>
-            </a:solidFill>
-            <a:prstDash val="solid"/>
-            <a:round/>
-            <a:headEnd len="sm" w="sm" type="none"/>
-            <a:tailEnd len="sm" w="sm" type="none"/>
+          <a:ln>
+            <a:noFill/>
           </a:ln>
         </p:spPr>
       </p:pic>
@@ -16706,6 +16233,9 @@
   <p:clrMapOvr>
     <a:masterClrMapping/>
   </p:clrMapOvr>
+  <p:transition spd="slow">
+    <p:wipe dir="l"/>
+  </p:transition>
 </p:sld>
 </file>
 
@@ -16714,7 +16244,7 @@
   <p:cSld>
     <p:spTree>
       <p:nvGrpSpPr>
-        <p:cNvPr id="182" name="Shape 182"/>
+        <p:cNvPr id="181" name="Shape 181"/>
         <p:cNvGrpSpPr/>
         <p:nvPr/>
       </p:nvGrpSpPr>
@@ -16728,7 +16258,7 @@
       </p:grpSpPr>
       <p:pic>
         <p:nvPicPr>
-          <p:cNvPr descr="EscuelaIT Duoc UC - Escuela de Informática y Telecomunicaciones Duoc UC - Duoc  UC | LinkedIn" id="183" name="Google Shape;183;g388615e3470_0_2"/>
+          <p:cNvPr descr="EscuelaIT Duoc UC - Escuela de Informática y Telecomunicaciones Duoc UC - Duoc  UC | LinkedIn" id="182" name="Google Shape;182;g3a1d312f352_0_11"/>
           <p:cNvPicPr preferRelativeResize="0"/>
           <p:nvPr/>
         </p:nvPicPr>
@@ -16755,14 +16285,14 @@
       </p:pic>
       <p:sp>
         <p:nvSpPr>
-          <p:cNvPr id="184" name="Google Shape;184;g388615e3470_0_2"/>
+          <p:cNvPr id="183" name="Google Shape;183;g3a1d312f352_0_11"/>
           <p:cNvSpPr txBox="1"/>
           <p:nvPr/>
         </p:nvSpPr>
         <p:spPr>
           <a:xfrm>
             <a:off x="136188" y="368928"/>
-            <a:ext cx="12192000" cy="400200"/>
+            <a:ext cx="12192000" cy="369300"/>
           </a:xfrm>
           <a:prstGeom prst="rect">
             <a:avLst/>
@@ -16791,12 +16321,12 @@
               <a:buClr>
                 <a:srgbClr val="000000"/>
               </a:buClr>
-              <a:buSzPts val="2000"/>
+              <a:buSzPts val="1800"/>
               <a:buFont typeface="Arial"/>
               <a:buNone/>
             </a:pPr>
             <a:r>
-              <a:rPr b="0" i="0" lang="es-MX" sz="2000" u="none" cap="none" strike="noStrike">
+              <a:rPr b="0" i="0" lang="es-MX" sz="1800" u="none" cap="none" strike="noStrike">
                 <a:solidFill>
                   <a:srgbClr val="757070"/>
                 </a:solidFill>
@@ -16807,7 +16337,7 @@
               </a:rPr>
               <a:t>Reparte+</a:t>
             </a:r>
-            <a:endParaRPr b="0" i="0" sz="1600" u="none" cap="none" strike="noStrike">
+            <a:endParaRPr b="0" i="0" sz="1400" u="none" cap="none" strike="noStrike">
               <a:solidFill>
                 <a:srgbClr val="000000"/>
               </a:solidFill>
@@ -16821,14 +16351,14 @@
       </p:sp>
       <p:sp>
         <p:nvSpPr>
-          <p:cNvPr id="185" name="Google Shape;185;g388615e3470_0_2"/>
+          <p:cNvPr id="184" name="Google Shape;184;g3a1d312f352_0_11"/>
           <p:cNvSpPr txBox="1"/>
           <p:nvPr/>
         </p:nvSpPr>
         <p:spPr>
           <a:xfrm>
-            <a:off x="136188" y="137064"/>
-            <a:ext cx="12192000" cy="646500"/>
+            <a:off x="2615850" y="230325"/>
+            <a:ext cx="6156300" cy="646500"/>
           </a:xfrm>
           <a:prstGeom prst="rect">
             <a:avLst/>
@@ -16862,23 +16392,56 @@
               <a:buNone/>
             </a:pPr>
             <a:r>
-              <a:t/>
+              <a:rPr b="0" i="0" lang="es-MX" sz="3600" u="none" cap="none" strike="noStrike">
+                <a:solidFill>
+                  <a:schemeClr val="dk1"/>
+                </a:solidFill>
+                <a:latin typeface="Calibri"/>
+                <a:ea typeface="Calibri"/>
+                <a:cs typeface="Calibri"/>
+                <a:sym typeface="Calibri"/>
+              </a:rPr>
+              <a:t>Modelo de </a:t>
             </a:r>
-            <a:endParaRPr b="0" i="0" sz="3600" u="none" cap="none" strike="noStrike">
+            <a:r>
+              <a:rPr lang="es-MX" sz="3600">
+                <a:solidFill>
+                  <a:schemeClr val="dk1"/>
+                </a:solidFill>
+                <a:latin typeface="Calibri"/>
+                <a:ea typeface="Calibri"/>
+                <a:cs typeface="Calibri"/>
+                <a:sym typeface="Calibri"/>
+              </a:rPr>
+              <a:t>D</a:t>
+            </a:r>
+            <a:r>
+              <a:rPr b="0" i="0" lang="es-MX" sz="3600" u="none" cap="none" strike="noStrike">
+                <a:solidFill>
+                  <a:schemeClr val="dk1"/>
+                </a:solidFill>
+                <a:latin typeface="Calibri"/>
+                <a:ea typeface="Calibri"/>
+                <a:cs typeface="Calibri"/>
+                <a:sym typeface="Calibri"/>
+              </a:rPr>
+              <a:t>atos </a:t>
+            </a:r>
+            <a:endParaRPr b="0" i="0" sz="1400" u="none" cap="none" strike="noStrike">
               <a:solidFill>
-                <a:schemeClr val="dk1"/>
+                <a:srgbClr val="000000"/>
               </a:solidFill>
-              <a:latin typeface="Calibri"/>
-              <a:ea typeface="Calibri"/>
-              <a:cs typeface="Calibri"/>
-              <a:sym typeface="Calibri"/>
+              <a:latin typeface="Arial"/>
+              <a:ea typeface="Arial"/>
+              <a:cs typeface="Arial"/>
+              <a:sym typeface="Arial"/>
             </a:endParaRPr>
           </a:p>
         </p:txBody>
       </p:sp>
       <p:cxnSp>
         <p:nvCxnSpPr>
-          <p:cNvPr id="186" name="Google Shape;186;g388615e3470_0_2"/>
+          <p:cNvPr id="185" name="Google Shape;185;g3a1d312f352_0_11"/>
           <p:cNvCxnSpPr/>
           <p:nvPr/>
         </p:nvCxnSpPr>
@@ -16904,7 +16467,7 @@
       </p:cxnSp>
       <p:pic>
         <p:nvPicPr>
-          <p:cNvPr id="187" name="Google Shape;187;g388615e3470_0_2"/>
+          <p:cNvPr id="186" name="Google Shape;186;g3a1d312f352_0_11" title="Mermaid Chart - Create complex, visual diagrams with text.-2025-11-10-004453.png"/>
           <p:cNvPicPr preferRelativeResize="0"/>
           <p:nvPr/>
         </p:nvPicPr>
@@ -16918,21 +16481,15 @@
         </p:blipFill>
         <p:spPr>
           <a:xfrm>
-            <a:off x="1282450" y="783575"/>
-            <a:ext cx="8899600" cy="5769624"/>
+            <a:off x="819900" y="992902"/>
+            <a:ext cx="10824612" cy="5560299"/>
           </a:xfrm>
           <a:prstGeom prst="rect">
             <a:avLst/>
           </a:prstGeom>
           <a:noFill/>
-          <a:ln cap="flat" cmpd="sng" w="9525">
-            <a:solidFill>
-              <a:schemeClr val="dk2"/>
-            </a:solidFill>
-            <a:prstDash val="solid"/>
-            <a:round/>
-            <a:headEnd len="sm" w="sm" type="none"/>
-            <a:tailEnd len="sm" w="sm" type="none"/>
+          <a:ln>
+            <a:noFill/>
           </a:ln>
         </p:spPr>
       </p:pic>
@@ -16949,7 +16506,7 @@
   <p:cSld>
     <p:spTree>
       <p:nvGrpSpPr>
-        <p:cNvPr id="191" name="Shape 191"/>
+        <p:cNvPr id="190" name="Shape 190"/>
         <p:cNvGrpSpPr/>
         <p:nvPr/>
       </p:nvGrpSpPr>
@@ -16963,7 +16520,7 @@
       </p:grpSpPr>
       <p:pic>
         <p:nvPicPr>
-          <p:cNvPr descr="EscuelaIT Duoc UC - Escuela de Informática y Telecomunicaciones Duoc UC - Duoc  UC | LinkedIn" id="192" name="Google Shape;192;p8"/>
+          <p:cNvPr descr="EscuelaIT Duoc UC - Escuela de Informática y Telecomunicaciones Duoc UC - Duoc  UC | LinkedIn" id="191" name="Google Shape;191;p10"/>
           <p:cNvPicPr preferRelativeResize="0"/>
           <p:nvPr/>
         </p:nvPicPr>
@@ -16990,14 +16547,14 @@
       </p:pic>
       <p:sp>
         <p:nvSpPr>
-          <p:cNvPr id="193" name="Google Shape;193;p8"/>
+          <p:cNvPr id="192" name="Google Shape;192;p10"/>
           <p:cNvSpPr txBox="1"/>
           <p:nvPr/>
         </p:nvSpPr>
         <p:spPr>
           <a:xfrm>
             <a:off x="136188" y="368928"/>
-            <a:ext cx="12192000" cy="400200"/>
+            <a:ext cx="12191999" cy="369332"/>
           </a:xfrm>
           <a:prstGeom prst="rect">
             <a:avLst/>
@@ -17026,12 +16583,12 @@
               <a:buClr>
                 <a:srgbClr val="000000"/>
               </a:buClr>
-              <a:buSzPts val="2000"/>
+              <a:buSzPts val="1800"/>
               <a:buFont typeface="Arial"/>
               <a:buNone/>
             </a:pPr>
             <a:r>
-              <a:rPr b="0" i="0" lang="es-MX" sz="2000" u="none" cap="none" strike="noStrike">
+              <a:rPr b="0" i="0" lang="es-MX" sz="1800" u="none" cap="none" strike="noStrike">
                 <a:solidFill>
                   <a:srgbClr val="757070"/>
                 </a:solidFill>
@@ -17042,7 +16599,7 @@
               </a:rPr>
               <a:t>Reparte+</a:t>
             </a:r>
-            <a:endParaRPr b="0" i="0" sz="1600" u="none" cap="none" strike="noStrike">
+            <a:endParaRPr b="0" i="0" sz="1400" u="none" cap="none" strike="noStrike">
               <a:solidFill>
                 <a:srgbClr val="000000"/>
               </a:solidFill>
@@ -17056,14 +16613,14 @@
       </p:sp>
       <p:sp>
         <p:nvSpPr>
-          <p:cNvPr id="194" name="Google Shape;194;p8"/>
+          <p:cNvPr id="193" name="Google Shape;193;p10"/>
           <p:cNvSpPr txBox="1"/>
           <p:nvPr/>
         </p:nvSpPr>
         <p:spPr>
           <a:xfrm>
-            <a:off x="-278450" y="368930"/>
-            <a:ext cx="12192000" cy="861900"/>
+            <a:off x="-119750" y="434780"/>
+            <a:ext cx="12192000" cy="646500"/>
           </a:xfrm>
           <a:prstGeom prst="rect">
             <a:avLst/>
@@ -17106,38 +16663,7 @@
                 <a:cs typeface="Calibri"/>
                 <a:sym typeface="Calibri"/>
               </a:rPr>
-              <a:t>Arquitectura del software</a:t>
-            </a:r>
-            <a:endParaRPr b="0" i="0" sz="1400" u="none" cap="none" strike="noStrike">
-              <a:solidFill>
-                <a:srgbClr val="000000"/>
-              </a:solidFill>
-              <a:latin typeface="Arial"/>
-              <a:ea typeface="Arial"/>
-              <a:cs typeface="Arial"/>
-              <a:sym typeface="Arial"/>
-            </a:endParaRPr>
-          </a:p>
-          <a:p>
-            <a:pPr indent="0" lvl="0" marL="0" marR="0" rtl="0" algn="ctr">
-              <a:lnSpc>
-                <a:spcPct val="100000"/>
-              </a:lnSpc>
-              <a:spcBef>
-                <a:spcPts val="0"/>
-              </a:spcBef>
-              <a:spcAft>
-                <a:spcPts val="0"/>
-              </a:spcAft>
-              <a:buClr>
-                <a:srgbClr val="000000"/>
-              </a:buClr>
-              <a:buSzPts val="1400"/>
-              <a:buFont typeface="Arial"/>
-              <a:buNone/>
-            </a:pPr>
-            <a:r>
-              <a:t/>
+              <a:t>Tecnologías utilizadas</a:t>
             </a:r>
             <a:endParaRPr b="0" i="0" sz="1400" u="none" cap="none" strike="noStrike">
               <a:solidFill>
@@ -17153,14 +16679,14 @@
       </p:sp>
       <p:cxnSp>
         <p:nvCxnSpPr>
-          <p:cNvPr id="195" name="Google Shape;195;p8"/>
+          <p:cNvPr id="194" name="Google Shape;194;p10"/>
           <p:cNvCxnSpPr/>
           <p:nvPr/>
         </p:nvCxnSpPr>
         <p:spPr>
           <a:xfrm>
-            <a:off x="217825" y="901527"/>
-            <a:ext cx="4085700" cy="0"/>
+            <a:off x="0" y="758027"/>
+            <a:ext cx="4085617" cy="0"/>
           </a:xfrm>
           <a:prstGeom prst="straightConnector1">
             <a:avLst/>
@@ -17179,7 +16705,7 @@
       </p:cxnSp>
       <p:pic>
         <p:nvPicPr>
-          <p:cNvPr id="196" name="Google Shape;196;p8"/>
+          <p:cNvPr id="195" name="Google Shape;195;p10"/>
           <p:cNvPicPr preferRelativeResize="0"/>
           <p:nvPr/>
         </p:nvPicPr>
@@ -17193,21 +16719,15 @@
         </p:blipFill>
         <p:spPr>
           <a:xfrm>
-            <a:off x="1542225" y="1033925"/>
-            <a:ext cx="9263776" cy="5697274"/>
+            <a:off x="2999125" y="1081275"/>
+            <a:ext cx="5686750" cy="5648526"/>
           </a:xfrm>
           <a:prstGeom prst="rect">
             <a:avLst/>
           </a:prstGeom>
           <a:noFill/>
-          <a:ln cap="flat" cmpd="sng" w="9525">
-            <a:solidFill>
-              <a:schemeClr val="dk2"/>
-            </a:solidFill>
-            <a:prstDash val="solid"/>
-            <a:round/>
-            <a:headEnd len="sm" w="sm" type="none"/>
-            <a:tailEnd len="sm" w="sm" type="none"/>
+          <a:ln>
+            <a:noFill/>
           </a:ln>
         </p:spPr>
       </p:pic>
@@ -17227,7 +16747,7 @@
   <p:cSld>
     <p:spTree>
       <p:nvGrpSpPr>
-        <p:cNvPr id="200" name="Shape 200"/>
+        <p:cNvPr id="199" name="Shape 199"/>
         <p:cNvGrpSpPr/>
         <p:nvPr/>
       </p:nvGrpSpPr>
@@ -17241,7 +16761,7 @@
       </p:grpSpPr>
       <p:pic>
         <p:nvPicPr>
-          <p:cNvPr descr="EscuelaIT Duoc UC - Escuela de Informática y Telecomunicaciones Duoc UC - Duoc  UC | LinkedIn" id="201" name="Google Shape;201;p9"/>
+          <p:cNvPr descr="EscuelaIT Duoc UC - Escuela de Informática y Telecomunicaciones Duoc UC - Duoc  UC | LinkedIn" id="200" name="Google Shape;200;p11"/>
           <p:cNvPicPr preferRelativeResize="0"/>
           <p:nvPr/>
         </p:nvPicPr>
@@ -17268,80 +16788,14 @@
       </p:pic>
       <p:sp>
         <p:nvSpPr>
-          <p:cNvPr id="202" name="Google Shape;202;p9"/>
+          <p:cNvPr id="201" name="Google Shape;201;p11"/>
           <p:cNvSpPr txBox="1"/>
           <p:nvPr/>
         </p:nvSpPr>
         <p:spPr>
           <a:xfrm>
-            <a:off x="136188" y="368928"/>
-            <a:ext cx="12191999" cy="369332"/>
-          </a:xfrm>
-          <a:prstGeom prst="rect">
-            <a:avLst/>
-          </a:prstGeom>
-          <a:noFill/>
-          <a:ln>
-            <a:noFill/>
-          </a:ln>
-        </p:spPr>
-        <p:txBody>
-          <a:bodyPr anchorCtr="0" anchor="t" bIns="45700" lIns="91425" spcFirstLastPara="1" rIns="91425" wrap="square" tIns="45700">
-            <a:spAutoFit/>
-          </a:bodyPr>
-          <a:lstStyle/>
-          <a:p>
-            <a:pPr indent="0" lvl="0" marL="0" marR="0" rtl="0" algn="l">
-              <a:lnSpc>
-                <a:spcPct val="100000"/>
-              </a:lnSpc>
-              <a:spcBef>
-                <a:spcPts val="0"/>
-              </a:spcBef>
-              <a:spcAft>
-                <a:spcPts val="0"/>
-              </a:spcAft>
-              <a:buClr>
-                <a:srgbClr val="000000"/>
-              </a:buClr>
-              <a:buSzPts val="1800"/>
-              <a:buFont typeface="Arial"/>
-              <a:buNone/>
-            </a:pPr>
-            <a:r>
-              <a:rPr b="0" i="0" lang="es-MX" sz="1800" u="none" cap="none" strike="noStrike">
-                <a:solidFill>
-                  <a:srgbClr val="757070"/>
-                </a:solidFill>
-                <a:latin typeface="Calibri"/>
-                <a:ea typeface="Calibri"/>
-                <a:cs typeface="Calibri"/>
-                <a:sym typeface="Calibri"/>
-              </a:rPr>
-              <a:t>Reparte+</a:t>
-            </a:r>
-            <a:endParaRPr b="0" i="0" sz="1400" u="none" cap="none" strike="noStrike">
-              <a:solidFill>
-                <a:srgbClr val="000000"/>
-              </a:solidFill>
-              <a:latin typeface="Arial"/>
-              <a:ea typeface="Arial"/>
-              <a:cs typeface="Arial"/>
-              <a:sym typeface="Arial"/>
-            </a:endParaRPr>
-          </a:p>
-        </p:txBody>
-      </p:sp>
-      <p:sp>
-        <p:nvSpPr>
-          <p:cNvPr id="203" name="Google Shape;203;p9"/>
-          <p:cNvSpPr txBox="1"/>
-          <p:nvPr/>
-        </p:nvSpPr>
-        <p:spPr>
-          <a:xfrm>
-            <a:off x="0" y="230343"/>
-            <a:ext cx="12192000" cy="646500"/>
+            <a:off x="1" y="2707792"/>
+            <a:ext cx="12192000" cy="1139100"/>
           </a:xfrm>
           <a:prstGeom prst="rect">
             <a:avLst/>
@@ -17370,12 +16824,12 @@
               <a:buClr>
                 <a:srgbClr val="000000"/>
               </a:buClr>
-              <a:buSzPts val="3600"/>
+              <a:buSzPts val="4400"/>
               <a:buFont typeface="Arial"/>
               <a:buNone/>
             </a:pPr>
             <a:r>
-              <a:rPr b="0" i="0" lang="es-MX" sz="3600" u="none" cap="none" strike="noStrike">
+              <a:rPr b="0" i="0" lang="es-MX" sz="4400" u="none" cap="none" strike="noStrike">
                 <a:solidFill>
                   <a:schemeClr val="dk1"/>
                 </a:solidFill>
@@ -17384,31 +16838,7 @@
                 <a:cs typeface="Calibri"/>
                 <a:sym typeface="Calibri"/>
               </a:rPr>
-              <a:t>Modelo de </a:t>
-            </a:r>
-            <a:r>
-              <a:rPr lang="es-MX" sz="3600">
-                <a:solidFill>
-                  <a:schemeClr val="dk1"/>
-                </a:solidFill>
-                <a:latin typeface="Calibri"/>
-                <a:ea typeface="Calibri"/>
-                <a:cs typeface="Calibri"/>
-                <a:sym typeface="Calibri"/>
-              </a:rPr>
-              <a:t>D</a:t>
-            </a:r>
-            <a:r>
-              <a:rPr b="0" i="0" lang="es-MX" sz="3600" u="none" cap="none" strike="noStrike">
-                <a:solidFill>
-                  <a:schemeClr val="dk1"/>
-                </a:solidFill>
-                <a:latin typeface="Calibri"/>
-                <a:ea typeface="Calibri"/>
-                <a:cs typeface="Calibri"/>
-                <a:sym typeface="Calibri"/>
-              </a:rPr>
-              <a:t>atos </a:t>
+              <a:t>DEMOSTRACIÓN DEL RESULTADO DEL PROYECTO</a:t>
             </a:r>
             <a:endParaRPr b="0" i="0" sz="1400" u="none" cap="none" strike="noStrike">
               <a:solidFill>
@@ -17420,67 +16850,39 @@
               <a:sym typeface="Arial"/>
             </a:endParaRPr>
           </a:p>
+          <a:p>
+            <a:pPr indent="0" lvl="0" marL="0" marR="0" rtl="0" algn="ctr">
+              <a:lnSpc>
+                <a:spcPct val="100000"/>
+              </a:lnSpc>
+              <a:spcBef>
+                <a:spcPts val="0"/>
+              </a:spcBef>
+              <a:spcAft>
+                <a:spcPts val="0"/>
+              </a:spcAft>
+              <a:buClr>
+                <a:srgbClr val="000000"/>
+              </a:buClr>
+              <a:buSzPts val="2400"/>
+              <a:buFont typeface="Arial"/>
+              <a:buNone/>
+            </a:pPr>
+            <a:r>
+              <a:t/>
+            </a:r>
+            <a:endParaRPr b="0" i="0" sz="2400" u="none" cap="none" strike="noStrike">
+              <a:solidFill>
+                <a:srgbClr val="757070"/>
+              </a:solidFill>
+              <a:latin typeface="Calibri"/>
+              <a:ea typeface="Calibri"/>
+              <a:cs typeface="Calibri"/>
+              <a:sym typeface="Calibri"/>
+            </a:endParaRPr>
+          </a:p>
         </p:txBody>
       </p:sp>
-      <p:cxnSp>
-        <p:nvCxnSpPr>
-          <p:cNvPr id="204" name="Google Shape;204;p9"/>
-          <p:cNvCxnSpPr/>
-          <p:nvPr/>
-        </p:nvCxnSpPr>
-        <p:spPr>
-          <a:xfrm>
-            <a:off x="0" y="758027"/>
-            <a:ext cx="4085617" cy="0"/>
-          </a:xfrm>
-          <a:prstGeom prst="straightConnector1">
-            <a:avLst/>
-          </a:prstGeom>
-          <a:noFill/>
-          <a:ln cap="flat" cmpd="sng" w="15875">
-            <a:solidFill>
-              <a:srgbClr val="F5F7FC"/>
-            </a:solidFill>
-            <a:prstDash val="solid"/>
-            <a:miter lim="800000"/>
-            <a:headEnd len="sm" w="sm" type="none"/>
-            <a:tailEnd len="sm" w="sm" type="none"/>
-          </a:ln>
-        </p:spPr>
-      </p:cxnSp>
-      <p:pic>
-        <p:nvPicPr>
-          <p:cNvPr id="205" name="Google Shape;205;p9" title="Untitled2.png"/>
-          <p:cNvPicPr preferRelativeResize="0"/>
-          <p:nvPr/>
-        </p:nvPicPr>
-        <p:blipFill rotWithShape="1">
-          <a:blip r:embed="rId4">
-            <a:alphaModFix/>
-          </a:blip>
-          <a:srcRect b="27546" l="0" r="19354" t="0"/>
-          <a:stretch/>
-        </p:blipFill>
-        <p:spPr>
-          <a:xfrm>
-            <a:off x="1130625" y="876850"/>
-            <a:ext cx="9528177" cy="5981151"/>
-          </a:xfrm>
-          <a:prstGeom prst="rect">
-            <a:avLst/>
-          </a:prstGeom>
-          <a:noFill/>
-          <a:ln cap="flat" cmpd="sng" w="9525">
-            <a:solidFill>
-              <a:schemeClr val="dk2"/>
-            </a:solidFill>
-            <a:prstDash val="solid"/>
-            <a:round/>
-            <a:headEnd len="sm" w="sm" type="none"/>
-            <a:tailEnd len="sm" w="sm" type="none"/>
-          </a:ln>
-        </p:spPr>
-      </p:pic>
     </p:spTree>
   </p:cSld>
   <p:clrMapOvr>
@@ -17497,7 +16899,7 @@
   <p:cSld>
     <p:spTree>
       <p:nvGrpSpPr>
-        <p:cNvPr id="209" name="Shape 209"/>
+        <p:cNvPr id="205" name="Shape 205"/>
         <p:cNvGrpSpPr/>
         <p:nvPr/>
       </p:nvGrpSpPr>
@@ -17511,7 +16913,7 @@
       </p:grpSpPr>
       <p:pic>
         <p:nvPicPr>
-          <p:cNvPr descr="EscuelaIT Duoc UC - Escuela de Informática y Telecomunicaciones Duoc UC - Duoc  UC | LinkedIn" id="210" name="Google Shape;210;g38db7480481_0_0"/>
+          <p:cNvPr descr="EscuelaIT Duoc UC - Escuela de Informática y Telecomunicaciones Duoc UC - Duoc  UC | LinkedIn" id="206" name="Google Shape;206;p12"/>
           <p:cNvPicPr preferRelativeResize="0"/>
           <p:nvPr/>
         </p:nvPicPr>
@@ -17538,80 +16940,14 @@
       </p:pic>
       <p:sp>
         <p:nvSpPr>
-          <p:cNvPr id="211" name="Google Shape;211;g38db7480481_0_0"/>
+          <p:cNvPr id="207" name="Google Shape;207;p12"/>
           <p:cNvSpPr txBox="1"/>
           <p:nvPr/>
         </p:nvSpPr>
         <p:spPr>
           <a:xfrm>
-            <a:off x="136188" y="368928"/>
-            <a:ext cx="12192000" cy="369300"/>
-          </a:xfrm>
-          <a:prstGeom prst="rect">
-            <a:avLst/>
-          </a:prstGeom>
-          <a:noFill/>
-          <a:ln>
-            <a:noFill/>
-          </a:ln>
-        </p:spPr>
-        <p:txBody>
-          <a:bodyPr anchorCtr="0" anchor="t" bIns="45700" lIns="91425" spcFirstLastPara="1" rIns="91425" wrap="square" tIns="45700">
-            <a:spAutoFit/>
-          </a:bodyPr>
-          <a:lstStyle/>
-          <a:p>
-            <a:pPr indent="0" lvl="0" marL="0" marR="0" rtl="0" algn="l">
-              <a:lnSpc>
-                <a:spcPct val="100000"/>
-              </a:lnSpc>
-              <a:spcBef>
-                <a:spcPts val="0"/>
-              </a:spcBef>
-              <a:spcAft>
-                <a:spcPts val="0"/>
-              </a:spcAft>
-              <a:buClr>
-                <a:srgbClr val="000000"/>
-              </a:buClr>
-              <a:buSzPts val="1800"/>
-              <a:buFont typeface="Arial"/>
-              <a:buNone/>
-            </a:pPr>
-            <a:r>
-              <a:rPr b="0" i="0" lang="es-MX" sz="1800" u="none" cap="none" strike="noStrike">
-                <a:solidFill>
-                  <a:srgbClr val="757070"/>
-                </a:solidFill>
-                <a:latin typeface="Calibri"/>
-                <a:ea typeface="Calibri"/>
-                <a:cs typeface="Calibri"/>
-                <a:sym typeface="Calibri"/>
-              </a:rPr>
-              <a:t>Reparte+</a:t>
-            </a:r>
-            <a:endParaRPr b="0" i="0" sz="1400" u="none" cap="none" strike="noStrike">
-              <a:solidFill>
-                <a:srgbClr val="000000"/>
-              </a:solidFill>
-              <a:latin typeface="Arial"/>
-              <a:ea typeface="Arial"/>
-              <a:cs typeface="Arial"/>
-              <a:sym typeface="Arial"/>
-            </a:endParaRPr>
-          </a:p>
-        </p:txBody>
-      </p:sp>
-      <p:sp>
-        <p:nvSpPr>
-          <p:cNvPr id="212" name="Google Shape;212;g38db7480481_0_0"/>
-          <p:cNvSpPr txBox="1"/>
-          <p:nvPr/>
-        </p:nvSpPr>
-        <p:spPr>
-          <a:xfrm>
-            <a:off x="258800" y="2870380"/>
-            <a:ext cx="12192000" cy="677100"/>
+            <a:off x="1" y="1176870"/>
+            <a:ext cx="12192000" cy="769500"/>
           </a:xfrm>
           <a:prstGeom prst="rect">
             <a:avLst/>
@@ -17640,12 +16976,12 @@
               <a:buClr>
                 <a:srgbClr val="000000"/>
               </a:buClr>
-              <a:buSzPts val="3600"/>
+              <a:buSzPts val="4400"/>
               <a:buFont typeface="Arial"/>
               <a:buNone/>
             </a:pPr>
             <a:r>
-              <a:rPr lang="es-MX" sz="3800">
+              <a:rPr b="0" i="0" lang="es-MX" sz="4400" u="none" cap="none" strike="noStrike">
                 <a:solidFill>
                   <a:schemeClr val="dk1"/>
                 </a:solidFill>
@@ -17654,21 +16990,9 @@
                 <a:cs typeface="Calibri"/>
                 <a:sym typeface="Calibri"/>
               </a:rPr>
-              <a:t>Demostración</a:t>
+              <a:t>Resultados obtenidos</a:t>
             </a:r>
-            <a:r>
-              <a:rPr lang="es-MX" sz="3800">
-                <a:solidFill>
-                  <a:schemeClr val="dk1"/>
-                </a:solidFill>
-                <a:latin typeface="Calibri"/>
-                <a:ea typeface="Calibri"/>
-                <a:cs typeface="Calibri"/>
-                <a:sym typeface="Calibri"/>
-              </a:rPr>
-              <a:t> APP</a:t>
-            </a:r>
-            <a:endParaRPr b="0" i="0" sz="1600" u="none" cap="none" strike="noStrike">
+            <a:endParaRPr b="0" i="0" sz="1400" u="none" cap="none" strike="noStrike">
               <a:solidFill>
                 <a:srgbClr val="000000"/>
               </a:solidFill>
@@ -17680,37 +17004,392 @@
           </a:p>
         </p:txBody>
       </p:sp>
-      <p:cxnSp>
-        <p:nvCxnSpPr>
-          <p:cNvPr id="213" name="Google Shape;213;g38db7480481_0_0"/>
-          <p:cNvCxnSpPr/>
+      <p:sp>
+        <p:nvSpPr>
+          <p:cNvPr id="208" name="Google Shape;208;p12"/>
+          <p:cNvSpPr txBox="1"/>
           <p:nvPr/>
-        </p:nvCxnSpPr>
+        </p:nvSpPr>
         <p:spPr>
           <a:xfrm>
-            <a:off x="0" y="758027"/>
-            <a:ext cx="4085700" cy="0"/>
+            <a:off x="532700" y="2229550"/>
+            <a:ext cx="11271300" cy="4462800"/>
           </a:xfrm>
-          <a:prstGeom prst="straightConnector1">
+          <a:prstGeom prst="rect">
             <a:avLst/>
           </a:prstGeom>
           <a:noFill/>
-          <a:ln cap="flat" cmpd="sng" w="15875">
-            <a:solidFill>
-              <a:srgbClr val="F5F7FC"/>
-            </a:solidFill>
-            <a:prstDash val="solid"/>
-            <a:miter lim="800000"/>
-            <a:headEnd len="sm" w="sm" type="none"/>
-            <a:tailEnd len="sm" w="sm" type="none"/>
+          <a:ln>
+            <a:noFill/>
           </a:ln>
         </p:spPr>
-      </p:cxnSp>
+        <p:txBody>
+          <a:bodyPr anchorCtr="0" anchor="t" bIns="91425" lIns="91425" spcFirstLastPara="1" rIns="91425" wrap="square" tIns="91425">
+            <a:noAutofit/>
+          </a:bodyPr>
+          <a:lstStyle/>
+          <a:p>
+            <a:pPr indent="-361950" lvl="0" marL="457200" rtl="0" algn="l">
+              <a:spcBef>
+                <a:spcPts val="0"/>
+              </a:spcBef>
+              <a:spcAft>
+                <a:spcPts val="0"/>
+              </a:spcAft>
+              <a:buClr>
+                <a:schemeClr val="dk1"/>
+              </a:buClr>
+              <a:buSzPts val="2100"/>
+              <a:buFont typeface="Calibri"/>
+              <a:buChar char="●"/>
+            </a:pPr>
+            <a:r>
+              <a:rPr lang="es-MX" sz="2100">
+                <a:solidFill>
+                  <a:schemeClr val="dk1"/>
+                </a:solidFill>
+                <a:latin typeface="Calibri"/>
+                <a:ea typeface="Calibri"/>
+                <a:cs typeface="Calibri"/>
+                <a:sym typeface="Calibri"/>
+              </a:rPr>
+              <a:t>Gestión completa de grupos de gasto compartido, con creación, edición y eliminación de grupos.</a:t>
+            </a:r>
+            <a:endParaRPr sz="2100">
+              <a:solidFill>
+                <a:schemeClr val="dk1"/>
+              </a:solidFill>
+              <a:latin typeface="Calibri"/>
+              <a:ea typeface="Calibri"/>
+              <a:cs typeface="Calibri"/>
+              <a:sym typeface="Calibri"/>
+            </a:endParaRPr>
+          </a:p>
+          <a:p>
+            <a:pPr indent="0" lvl="0" marL="457200" rtl="0" algn="l">
+              <a:spcBef>
+                <a:spcPts val="0"/>
+              </a:spcBef>
+              <a:spcAft>
+                <a:spcPts val="0"/>
+              </a:spcAft>
+              <a:buNone/>
+            </a:pPr>
+            <a:r>
+              <a:t/>
+            </a:r>
+            <a:endParaRPr sz="2100">
+              <a:solidFill>
+                <a:schemeClr val="dk1"/>
+              </a:solidFill>
+              <a:latin typeface="Calibri"/>
+              <a:ea typeface="Calibri"/>
+              <a:cs typeface="Calibri"/>
+              <a:sym typeface="Calibri"/>
+            </a:endParaRPr>
+          </a:p>
+          <a:p>
+            <a:pPr indent="-361950" lvl="0" marL="457200" rtl="0" algn="l">
+              <a:spcBef>
+                <a:spcPts val="0"/>
+              </a:spcBef>
+              <a:spcAft>
+                <a:spcPts val="0"/>
+              </a:spcAft>
+              <a:buClr>
+                <a:schemeClr val="dk1"/>
+              </a:buClr>
+              <a:buSzPts val="2100"/>
+              <a:buFont typeface="Calibri"/>
+              <a:buChar char="●"/>
+            </a:pPr>
+            <a:r>
+              <a:rPr lang="es-MX" sz="2100">
+                <a:solidFill>
+                  <a:schemeClr val="dk1"/>
+                </a:solidFill>
+                <a:latin typeface="Calibri"/>
+                <a:ea typeface="Calibri"/>
+                <a:cs typeface="Calibri"/>
+                <a:sym typeface="Calibri"/>
+              </a:rPr>
+              <a:t>Registro detallado de gastos con descripción, monto, pagador, fecha y comprobante (imagen desde galería o cámara).</a:t>
+            </a:r>
+            <a:endParaRPr sz="2100">
+              <a:solidFill>
+                <a:schemeClr val="dk1"/>
+              </a:solidFill>
+              <a:latin typeface="Calibri"/>
+              <a:ea typeface="Calibri"/>
+              <a:cs typeface="Calibri"/>
+              <a:sym typeface="Calibri"/>
+            </a:endParaRPr>
+          </a:p>
+          <a:p>
+            <a:pPr indent="0" lvl="0" marL="457200" rtl="0" algn="l">
+              <a:spcBef>
+                <a:spcPts val="0"/>
+              </a:spcBef>
+              <a:spcAft>
+                <a:spcPts val="0"/>
+              </a:spcAft>
+              <a:buNone/>
+            </a:pPr>
+            <a:r>
+              <a:t/>
+            </a:r>
+            <a:endParaRPr sz="2100">
+              <a:solidFill>
+                <a:schemeClr val="dk1"/>
+              </a:solidFill>
+              <a:latin typeface="Calibri"/>
+              <a:ea typeface="Calibri"/>
+              <a:cs typeface="Calibri"/>
+              <a:sym typeface="Calibri"/>
+            </a:endParaRPr>
+          </a:p>
+          <a:p>
+            <a:pPr indent="-361950" lvl="0" marL="457200" rtl="0" algn="l">
+              <a:spcBef>
+                <a:spcPts val="0"/>
+              </a:spcBef>
+              <a:spcAft>
+                <a:spcPts val="0"/>
+              </a:spcAft>
+              <a:buClr>
+                <a:schemeClr val="dk1"/>
+              </a:buClr>
+              <a:buSzPts val="2100"/>
+              <a:buFont typeface="Calibri"/>
+              <a:buChar char="●"/>
+            </a:pPr>
+            <a:r>
+              <a:rPr lang="es-MX" sz="2100">
+                <a:solidFill>
+                  <a:schemeClr val="dk1"/>
+                </a:solidFill>
+                <a:latin typeface="Calibri"/>
+                <a:ea typeface="Calibri"/>
+                <a:cs typeface="Calibri"/>
+                <a:sym typeface="Calibri"/>
+              </a:rPr>
+              <a:t>Cálculo automático de saldos, </a:t>
+            </a:r>
+            <a:r>
+              <a:rPr lang="es-MX" sz="2100">
+                <a:solidFill>
+                  <a:schemeClr val="dk1"/>
+                </a:solidFill>
+                <a:latin typeface="Calibri"/>
+                <a:ea typeface="Calibri"/>
+                <a:cs typeface="Calibri"/>
+                <a:sym typeface="Calibri"/>
+              </a:rPr>
+              <a:t>disponibilizando</a:t>
+            </a:r>
+            <a:r>
+              <a:rPr lang="es-MX" sz="2100">
+                <a:solidFill>
+                  <a:schemeClr val="dk1"/>
+                </a:solidFill>
+                <a:latin typeface="Calibri"/>
+                <a:ea typeface="Calibri"/>
+                <a:cs typeface="Calibri"/>
+                <a:sym typeface="Calibri"/>
+              </a:rPr>
+              <a:t> pagadores y cuánto debe aportar cada integrante del grupo.</a:t>
+            </a:r>
+            <a:endParaRPr sz="2100">
+              <a:solidFill>
+                <a:schemeClr val="dk1"/>
+              </a:solidFill>
+              <a:latin typeface="Calibri"/>
+              <a:ea typeface="Calibri"/>
+              <a:cs typeface="Calibri"/>
+              <a:sym typeface="Calibri"/>
+            </a:endParaRPr>
+          </a:p>
+          <a:p>
+            <a:pPr indent="0" lvl="0" marL="457200" rtl="0" algn="l">
+              <a:spcBef>
+                <a:spcPts val="0"/>
+              </a:spcBef>
+              <a:spcAft>
+                <a:spcPts val="0"/>
+              </a:spcAft>
+              <a:buNone/>
+            </a:pPr>
+            <a:r>
+              <a:t/>
+            </a:r>
+            <a:endParaRPr sz="2100">
+              <a:solidFill>
+                <a:schemeClr val="dk1"/>
+              </a:solidFill>
+              <a:latin typeface="Calibri"/>
+              <a:ea typeface="Calibri"/>
+              <a:cs typeface="Calibri"/>
+              <a:sym typeface="Calibri"/>
+            </a:endParaRPr>
+          </a:p>
+          <a:p>
+            <a:pPr indent="-361950" lvl="0" marL="457200" rtl="0" algn="l">
+              <a:spcBef>
+                <a:spcPts val="0"/>
+              </a:spcBef>
+              <a:spcAft>
+                <a:spcPts val="0"/>
+              </a:spcAft>
+              <a:buClr>
+                <a:schemeClr val="dk1"/>
+              </a:buClr>
+              <a:buSzPts val="2100"/>
+              <a:buFont typeface="Calibri"/>
+              <a:buChar char="●"/>
+            </a:pPr>
+            <a:r>
+              <a:rPr lang="es-MX" sz="2100">
+                <a:solidFill>
+                  <a:schemeClr val="dk1"/>
+                </a:solidFill>
+                <a:latin typeface="Calibri"/>
+                <a:ea typeface="Calibri"/>
+                <a:cs typeface="Calibri"/>
+                <a:sym typeface="Calibri"/>
+              </a:rPr>
+              <a:t>Integración con AWS Bedrock (IA generativa) para análisis y escaneo de Boleta.</a:t>
+            </a:r>
+            <a:endParaRPr sz="2100">
+              <a:solidFill>
+                <a:schemeClr val="dk1"/>
+              </a:solidFill>
+              <a:latin typeface="Calibri"/>
+              <a:ea typeface="Calibri"/>
+              <a:cs typeface="Calibri"/>
+              <a:sym typeface="Calibri"/>
+            </a:endParaRPr>
+          </a:p>
+          <a:p>
+            <a:pPr indent="0" lvl="0" marL="457200" rtl="0" algn="l">
+              <a:spcBef>
+                <a:spcPts val="0"/>
+              </a:spcBef>
+              <a:spcAft>
+                <a:spcPts val="0"/>
+              </a:spcAft>
+              <a:buNone/>
+            </a:pPr>
+            <a:r>
+              <a:t/>
+            </a:r>
+            <a:endParaRPr sz="2100">
+              <a:solidFill>
+                <a:schemeClr val="dk1"/>
+              </a:solidFill>
+              <a:latin typeface="Calibri"/>
+              <a:ea typeface="Calibri"/>
+              <a:cs typeface="Calibri"/>
+              <a:sym typeface="Calibri"/>
+            </a:endParaRPr>
+          </a:p>
+          <a:p>
+            <a:pPr indent="-361950" lvl="0" marL="457200" rtl="0" algn="l">
+              <a:spcBef>
+                <a:spcPts val="0"/>
+              </a:spcBef>
+              <a:spcAft>
+                <a:spcPts val="0"/>
+              </a:spcAft>
+              <a:buClr>
+                <a:schemeClr val="dk1"/>
+              </a:buClr>
+              <a:buSzPts val="2100"/>
+              <a:buFont typeface="Calibri"/>
+              <a:buChar char="●"/>
+            </a:pPr>
+            <a:r>
+              <a:rPr lang="es-MX" sz="2100">
+                <a:solidFill>
+                  <a:schemeClr val="dk1"/>
+                </a:solidFill>
+                <a:latin typeface="Calibri"/>
+                <a:ea typeface="Calibri"/>
+                <a:cs typeface="Calibri"/>
+                <a:sym typeface="Calibri"/>
+              </a:rPr>
+              <a:t>Monitoreo y seguridad operativa activa, con AWS CloudWatch, GuardDuty y CloudTrail.</a:t>
+            </a:r>
+            <a:endParaRPr sz="2100">
+              <a:solidFill>
+                <a:schemeClr val="dk1"/>
+              </a:solidFill>
+              <a:latin typeface="Calibri"/>
+              <a:ea typeface="Calibri"/>
+              <a:cs typeface="Calibri"/>
+              <a:sym typeface="Calibri"/>
+            </a:endParaRPr>
+          </a:p>
+          <a:p>
+            <a:pPr indent="0" lvl="0" marL="0" rtl="0" algn="l">
+              <a:spcBef>
+                <a:spcPts val="0"/>
+              </a:spcBef>
+              <a:spcAft>
+                <a:spcPts val="0"/>
+              </a:spcAft>
+              <a:buClr>
+                <a:schemeClr val="dk1"/>
+              </a:buClr>
+              <a:buSzPts val="1100"/>
+              <a:buFont typeface="Arial"/>
+              <a:buNone/>
+            </a:pPr>
+            <a:r>
+              <a:t/>
+            </a:r>
+            <a:endParaRPr sz="2800">
+              <a:solidFill>
+                <a:schemeClr val="dk1"/>
+              </a:solidFill>
+              <a:latin typeface="Calibri"/>
+              <a:ea typeface="Calibri"/>
+              <a:cs typeface="Calibri"/>
+              <a:sym typeface="Calibri"/>
+            </a:endParaRPr>
+          </a:p>
+          <a:p>
+            <a:pPr indent="0" lvl="0" marL="0" rtl="0" algn="l">
+              <a:spcBef>
+                <a:spcPts val="0"/>
+              </a:spcBef>
+              <a:spcAft>
+                <a:spcPts val="0"/>
+              </a:spcAft>
+              <a:buNone/>
+            </a:pPr>
+            <a:r>
+              <a:t/>
+            </a:r>
+            <a:endParaRPr sz="2800">
+              <a:solidFill>
+                <a:schemeClr val="dk1"/>
+              </a:solidFill>
+              <a:latin typeface="Calibri"/>
+              <a:ea typeface="Calibri"/>
+              <a:cs typeface="Calibri"/>
+              <a:sym typeface="Calibri"/>
+            </a:endParaRPr>
+          </a:p>
+        </p:txBody>
+      </p:sp>
     </p:spTree>
   </p:cSld>
   <p:clrMapOvr>
     <a:masterClrMapping/>
   </p:clrMapOvr>
+  <p:transition spd="slow">
+    <p:wipe dir="l"/>
+  </p:transition>
 </p:sld>
 </file>
 
@@ -17719,7 +17398,7 @@
   <p:cSld>
     <p:spTree>
       <p:nvGrpSpPr>
-        <p:cNvPr id="217" name="Shape 217"/>
+        <p:cNvPr id="212" name="Shape 212"/>
         <p:cNvGrpSpPr/>
         <p:nvPr/>
       </p:nvGrpSpPr>
@@ -17733,7 +17412,7 @@
       </p:grpSpPr>
       <p:pic>
         <p:nvPicPr>
-          <p:cNvPr descr="EscuelaIT Duoc UC - Escuela de Informática y Telecomunicaciones Duoc UC - Duoc  UC | LinkedIn" id="218" name="Google Shape;218;g37beaa24df5_1_4"/>
+          <p:cNvPr descr="EscuelaIT Duoc UC - Escuela de Informática y Telecomunicaciones Duoc UC - Duoc  UC | LinkedIn" id="213" name="Google Shape;213;p13"/>
           <p:cNvPicPr preferRelativeResize="0"/>
           <p:nvPr/>
         </p:nvPicPr>
@@ -17760,80 +17439,14 @@
       </p:pic>
       <p:sp>
         <p:nvSpPr>
-          <p:cNvPr id="219" name="Google Shape;219;g37beaa24df5_1_4"/>
+          <p:cNvPr id="214" name="Google Shape;214;p13"/>
           <p:cNvSpPr txBox="1"/>
           <p:nvPr/>
         </p:nvSpPr>
         <p:spPr>
           <a:xfrm>
-            <a:off x="136188" y="368928"/>
-            <a:ext cx="12192000" cy="369300"/>
-          </a:xfrm>
-          <a:prstGeom prst="rect">
-            <a:avLst/>
-          </a:prstGeom>
-          <a:noFill/>
-          <a:ln>
-            <a:noFill/>
-          </a:ln>
-        </p:spPr>
-        <p:txBody>
-          <a:bodyPr anchorCtr="0" anchor="t" bIns="45700" lIns="91425" spcFirstLastPara="1" rIns="91425" wrap="square" tIns="45700">
-            <a:spAutoFit/>
-          </a:bodyPr>
-          <a:lstStyle/>
-          <a:p>
-            <a:pPr indent="0" lvl="0" marL="0" marR="0" rtl="0" algn="l">
-              <a:lnSpc>
-                <a:spcPct val="100000"/>
-              </a:lnSpc>
-              <a:spcBef>
-                <a:spcPts val="0"/>
-              </a:spcBef>
-              <a:spcAft>
-                <a:spcPts val="0"/>
-              </a:spcAft>
-              <a:buClr>
-                <a:srgbClr val="000000"/>
-              </a:buClr>
-              <a:buSzPts val="1800"/>
-              <a:buFont typeface="Arial"/>
-              <a:buNone/>
-            </a:pPr>
-            <a:r>
-              <a:rPr b="0" i="0" lang="es-MX" sz="1800" u="none" cap="none" strike="noStrike">
-                <a:solidFill>
-                  <a:srgbClr val="757070"/>
-                </a:solidFill>
-                <a:latin typeface="Calibri"/>
-                <a:ea typeface="Calibri"/>
-                <a:cs typeface="Calibri"/>
-                <a:sym typeface="Calibri"/>
-              </a:rPr>
-              <a:t>Reparte+</a:t>
-            </a:r>
-            <a:endParaRPr b="0" i="0" sz="1400" u="none" cap="none" strike="noStrike">
-              <a:solidFill>
-                <a:srgbClr val="000000"/>
-              </a:solidFill>
-              <a:latin typeface="Arial"/>
-              <a:ea typeface="Arial"/>
-              <a:cs typeface="Arial"/>
-              <a:sym typeface="Arial"/>
-            </a:endParaRPr>
-          </a:p>
-        </p:txBody>
-      </p:sp>
-      <p:sp>
-        <p:nvSpPr>
-          <p:cNvPr id="220" name="Google Shape;220;g37beaa24df5_1_4"/>
-          <p:cNvSpPr txBox="1"/>
-          <p:nvPr/>
-        </p:nvSpPr>
-        <p:spPr>
-          <a:xfrm>
-            <a:off x="136200" y="3040955"/>
-            <a:ext cx="12192000" cy="646500"/>
+            <a:off x="1" y="1078548"/>
+            <a:ext cx="12192000" cy="769500"/>
           </a:xfrm>
           <a:prstGeom prst="rect">
             <a:avLst/>
@@ -17862,12 +17475,12 @@
               <a:buClr>
                 <a:srgbClr val="000000"/>
               </a:buClr>
-              <a:buSzPts val="3600"/>
+              <a:buSzPts val="4400"/>
               <a:buFont typeface="Arial"/>
               <a:buNone/>
             </a:pPr>
             <a:r>
-              <a:rPr b="0" i="0" lang="es-MX" sz="3600" u="none" cap="none" strike="noStrike">
+              <a:rPr b="0" i="0" lang="es-MX" sz="4400" u="none" cap="none" strike="noStrike">
                 <a:solidFill>
                   <a:schemeClr val="dk1"/>
                 </a:solidFill>
@@ -17876,7 +17489,7 @@
                 <a:cs typeface="Calibri"/>
                 <a:sym typeface="Calibri"/>
               </a:rPr>
-              <a:t>¡Muchas Gracias!</a:t>
+              <a:t>Obstáculos presentados durante el desarrollo</a:t>
             </a:r>
             <a:endParaRPr b="0" i="0" sz="1400" u="none" cap="none" strike="noStrike">
               <a:solidFill>
@@ -17890,37 +17503,91 @@
           </a:p>
         </p:txBody>
       </p:sp>
-      <p:cxnSp>
-        <p:nvCxnSpPr>
-          <p:cNvPr id="221" name="Google Shape;221;g37beaa24df5_1_4"/>
-          <p:cNvCxnSpPr/>
+      <p:sp>
+        <p:nvSpPr>
+          <p:cNvPr id="215" name="Google Shape;215;p13"/>
+          <p:cNvSpPr txBox="1"/>
           <p:nvPr/>
-        </p:nvCxnSpPr>
+        </p:nvSpPr>
         <p:spPr>
           <a:xfrm>
-            <a:off x="0" y="758027"/>
-            <a:ext cx="4085700" cy="0"/>
+            <a:off x="832550" y="2211925"/>
+            <a:ext cx="9613200" cy="4303800"/>
           </a:xfrm>
-          <a:prstGeom prst="straightConnector1">
+          <a:prstGeom prst="rect">
             <a:avLst/>
           </a:prstGeom>
           <a:noFill/>
-          <a:ln cap="flat" cmpd="sng" w="15875">
-            <a:solidFill>
-              <a:srgbClr val="F5F7FC"/>
-            </a:solidFill>
-            <a:prstDash val="solid"/>
-            <a:miter lim="800000"/>
-            <a:headEnd len="sm" w="sm" type="none"/>
-            <a:tailEnd len="sm" w="sm" type="none"/>
+          <a:ln>
+            <a:noFill/>
           </a:ln>
         </p:spPr>
-      </p:cxnSp>
+        <p:txBody>
+          <a:bodyPr anchorCtr="0" anchor="t" bIns="91425" lIns="91425" spcFirstLastPara="1" rIns="91425" wrap="square" tIns="91425">
+            <a:noAutofit/>
+          </a:bodyPr>
+          <a:lstStyle/>
+          <a:p>
+            <a:pPr indent="0" lvl="0" marL="0" rtl="0" algn="l">
+              <a:spcBef>
+                <a:spcPts val="0"/>
+              </a:spcBef>
+              <a:spcAft>
+                <a:spcPts val="0"/>
+              </a:spcAft>
+              <a:buNone/>
+            </a:pPr>
+            <a:r>
+              <a:t/>
+            </a:r>
+            <a:endParaRPr sz="2800">
+              <a:solidFill>
+                <a:schemeClr val="dk1"/>
+              </a:solidFill>
+              <a:latin typeface="Calibri"/>
+              <a:ea typeface="Calibri"/>
+              <a:cs typeface="Calibri"/>
+              <a:sym typeface="Calibri"/>
+            </a:endParaRPr>
+          </a:p>
+        </p:txBody>
+      </p:sp>
+      <p:pic>
+        <p:nvPicPr>
+          <p:cNvPr id="216" name="Google Shape;216;p13"/>
+          <p:cNvPicPr preferRelativeResize="0"/>
+          <p:nvPr/>
+        </p:nvPicPr>
+        <p:blipFill>
+          <a:blip r:embed="rId4">
+            <a:alphaModFix/>
+          </a:blip>
+          <a:stretch>
+            <a:fillRect/>
+          </a:stretch>
+        </p:blipFill>
+        <p:spPr>
+          <a:xfrm>
+            <a:off x="945050" y="2000875"/>
+            <a:ext cx="10301900" cy="3957100"/>
+          </a:xfrm>
+          <a:prstGeom prst="rect">
+            <a:avLst/>
+          </a:prstGeom>
+          <a:noFill/>
+          <a:ln>
+            <a:noFill/>
+          </a:ln>
+        </p:spPr>
+      </p:pic>
     </p:spTree>
   </p:cSld>
   <p:clrMapOvr>
     <a:masterClrMapping/>
   </p:clrMapOvr>
+  <p:transition spd="slow">
+    <p:wipe dir="l"/>
+  </p:transition>
 </p:sld>
 </file>
 
@@ -17929,7 +17596,7 @@
   <p:cSld>
     <p:spTree>
       <p:nvGrpSpPr>
-        <p:cNvPr id="225" name="Shape 225"/>
+        <p:cNvPr id="220" name="Shape 220"/>
         <p:cNvGrpSpPr/>
         <p:nvPr/>
       </p:nvGrpSpPr>
@@ -17943,7 +17610,7 @@
       </p:grpSpPr>
       <p:pic>
         <p:nvPicPr>
-          <p:cNvPr descr="EscuelaIT Duoc UC - Escuela de Informática y Telecomunicaciones Duoc UC - Duoc  UC | LinkedIn" id="226" name="Google Shape;226;p14"/>
+          <p:cNvPr descr="EscuelaIT Duoc UC - Escuela de Informática y Telecomunicaciones Duoc UC - Duoc  UC | LinkedIn" id="221" name="Google Shape;221;g39d40bac61c_0_37"/>
           <p:cNvPicPr preferRelativeResize="0"/>
           <p:nvPr/>
         </p:nvPicPr>
@@ -17970,14 +17637,14 @@
       </p:pic>
       <p:sp>
         <p:nvSpPr>
-          <p:cNvPr id="227" name="Google Shape;227;p14"/>
+          <p:cNvPr id="222" name="Google Shape;222;g39d40bac61c_0_37"/>
           <p:cNvSpPr txBox="1"/>
           <p:nvPr/>
         </p:nvSpPr>
         <p:spPr>
           <a:xfrm>
-            <a:off x="0" y="3044279"/>
-            <a:ext cx="12191999" cy="769441"/>
+            <a:off x="2476500" y="2997750"/>
+            <a:ext cx="7662000" cy="1548300"/>
           </a:xfrm>
           <a:prstGeom prst="rect">
             <a:avLst/>
@@ -17993,25 +17660,25 @@
           </a:bodyPr>
           <a:lstStyle/>
           <a:p>
-            <a:pPr indent="0" lvl="0" marL="0" marR="0" rtl="0" algn="ctr">
-              <a:lnSpc>
-                <a:spcPct val="100000"/>
-              </a:lnSpc>
-              <a:spcBef>
-                <a:spcPts val="0"/>
-              </a:spcBef>
-              <a:spcAft>
-                <a:spcPts val="0"/>
-              </a:spcAft>
-              <a:buClr>
-                <a:srgbClr val="000000"/>
-              </a:buClr>
-              <a:buSzPts val="4400"/>
+            <a:pPr indent="0" lvl="0" marL="0" rtl="0" algn="l">
+              <a:lnSpc>
+                <a:spcPct val="115000"/>
+              </a:lnSpc>
+              <a:spcBef>
+                <a:spcPts val="0"/>
+              </a:spcBef>
+              <a:spcAft>
+                <a:spcPts val="0"/>
+              </a:spcAft>
+              <a:buClr>
+                <a:schemeClr val="dk1"/>
+              </a:buClr>
+              <a:buSzPts val="1100"/>
               <a:buFont typeface="Arial"/>
               <a:buNone/>
             </a:pPr>
             <a:r>
-              <a:rPr b="0" i="0" lang="es-MX" sz="4400" u="none" cap="none" strike="noStrike">
+              <a:rPr lang="es-MX" sz="4400">
                 <a:solidFill>
                   <a:schemeClr val="dk1"/>
                 </a:solidFill>
@@ -18020,350 +17687,16 @@
                 <a:cs typeface="Calibri"/>
                 <a:sym typeface="Calibri"/>
               </a:rPr>
-              <a:t>PREGUNTAS?</a:t>
+              <a:t>Muchas gracias por su atención</a:t>
             </a:r>
-            <a:endParaRPr b="0" i="0" sz="1400" u="none" cap="none" strike="noStrike">
+            <a:endParaRPr sz="4400">
               <a:solidFill>
-                <a:srgbClr val="000000"/>
+                <a:schemeClr val="dk1"/>
               </a:solidFill>
-              <a:latin typeface="Arial"/>
-              <a:ea typeface="Arial"/>
-              <a:cs typeface="Arial"/>
-              <a:sym typeface="Arial"/>
-            </a:endParaRPr>
-          </a:p>
-        </p:txBody>
-      </p:sp>
-    </p:spTree>
-  </p:cSld>
-  <p:clrMapOvr>
-    <a:masterClrMapping/>
-  </p:clrMapOvr>
-  <p:transition spd="slow">
-    <p:wipe dir="l"/>
-  </p:transition>
-</p:sld>
-</file>
-
-<file path=ppt/slides/slide17.xml><?xml version="1.0" encoding="utf-8"?>
-<p:sld xmlns:a="http://schemas.openxmlformats.org/drawingml/2006/main" xmlns:r="http://schemas.openxmlformats.org/officeDocument/2006/relationships" xmlns:mc="http://schemas.openxmlformats.org/markup-compatibility/2006" xmlns:mv="urn:schemas-microsoft-com:mac:vml" xmlns:p="http://schemas.openxmlformats.org/presentationml/2006/main" xmlns:c="http://schemas.openxmlformats.org/drawingml/2006/chart" xmlns:dgm="http://schemas.openxmlformats.org/drawingml/2006/diagram" xmlns:o="urn:schemas-microsoft-com:office:office" xmlns:v="urn:schemas-microsoft-com:vml" xmlns:pvml="urn:schemas-microsoft-com:office:powerpoint" xmlns:com="http://schemas.openxmlformats.org/drawingml/2006/compatibility" xmlns:p14="http://schemas.microsoft.com/office/powerpoint/2010/main" xmlns:p15="http://schemas.microsoft.com/office/powerpoint/2012/main" xmlns:ahyp="http://schemas.microsoft.com/office/drawing/2018/hyperlinkcolor" show="0">
-  <p:cSld>
-    <p:spTree>
-      <p:nvGrpSpPr>
-        <p:cNvPr id="231" name="Shape 231"/>
-        <p:cNvGrpSpPr/>
-        <p:nvPr/>
-      </p:nvGrpSpPr>
-      <p:grpSpPr>
-        <a:xfrm>
-          <a:off x="0" y="0"/>
-          <a:ext cx="0" cy="0"/>
-          <a:chOff x="0" y="0"/>
-          <a:chExt cx="0" cy="0"/>
-        </a:xfrm>
-      </p:grpSpPr>
-      <p:pic>
-        <p:nvPicPr>
-          <p:cNvPr descr="EscuelaIT Duoc UC - Escuela de Informática y Telecomunicaciones Duoc UC - Duoc  UC | LinkedIn" id="232" name="Google Shape;232;p10"/>
-          <p:cNvPicPr preferRelativeResize="0"/>
-          <p:nvPr/>
-        </p:nvPicPr>
-        <p:blipFill rotWithShape="1">
-          <a:blip r:embed="rId3">
-            <a:alphaModFix/>
-          </a:blip>
-          <a:srcRect b="0" l="0" r="0" t="0"/>
-          <a:stretch/>
-        </p:blipFill>
-        <p:spPr>
-          <a:xfrm>
-            <a:off x="8772152" y="207550"/>
-            <a:ext cx="3141406" cy="785352"/>
-          </a:xfrm>
-          <a:prstGeom prst="rect">
-            <a:avLst/>
-          </a:prstGeom>
-          <a:noFill/>
-          <a:ln>
-            <a:noFill/>
-          </a:ln>
-        </p:spPr>
-      </p:pic>
-      <p:sp>
-        <p:nvSpPr>
-          <p:cNvPr id="233" name="Google Shape;233;p10"/>
-          <p:cNvSpPr txBox="1"/>
-          <p:nvPr/>
-        </p:nvSpPr>
-        <p:spPr>
-          <a:xfrm>
-            <a:off x="136188" y="368928"/>
-            <a:ext cx="12191999" cy="369332"/>
-          </a:xfrm>
-          <a:prstGeom prst="rect">
-            <a:avLst/>
-          </a:prstGeom>
-          <a:noFill/>
-          <a:ln>
-            <a:noFill/>
-          </a:ln>
-        </p:spPr>
-        <p:txBody>
-          <a:bodyPr anchorCtr="0" anchor="t" bIns="45700" lIns="91425" spcFirstLastPara="1" rIns="91425" wrap="square" tIns="45700">
-            <a:spAutoFit/>
-          </a:bodyPr>
-          <a:lstStyle/>
-          <a:p>
-            <a:pPr indent="0" lvl="0" marL="0" marR="0" rtl="0" algn="l">
-              <a:lnSpc>
-                <a:spcPct val="100000"/>
-              </a:lnSpc>
-              <a:spcBef>
-                <a:spcPts val="0"/>
-              </a:spcBef>
-              <a:spcAft>
-                <a:spcPts val="0"/>
-              </a:spcAft>
-              <a:buClr>
-                <a:srgbClr val="000000"/>
-              </a:buClr>
-              <a:buSzPts val="1800"/>
-              <a:buFont typeface="Arial"/>
-              <a:buNone/>
-            </a:pPr>
-            <a:r>
-              <a:rPr b="0" i="0" lang="es-MX" sz="1800" u="none" cap="none" strike="noStrike">
-                <a:solidFill>
-                  <a:srgbClr val="757070"/>
-                </a:solidFill>
-                <a:latin typeface="Calibri"/>
-                <a:ea typeface="Calibri"/>
-                <a:cs typeface="Calibri"/>
-                <a:sym typeface="Calibri"/>
-              </a:rPr>
-              <a:t>Reparte+</a:t>
-            </a:r>
-            <a:endParaRPr b="0" i="0" sz="1400" u="none" cap="none" strike="noStrike">
-              <a:solidFill>
-                <a:srgbClr val="000000"/>
-              </a:solidFill>
-              <a:latin typeface="Arial"/>
-              <a:ea typeface="Arial"/>
-              <a:cs typeface="Arial"/>
-              <a:sym typeface="Arial"/>
-            </a:endParaRPr>
-          </a:p>
-        </p:txBody>
-      </p:sp>
-      <p:sp>
-        <p:nvSpPr>
-          <p:cNvPr id="234" name="Google Shape;234;p10"/>
-          <p:cNvSpPr txBox="1"/>
-          <p:nvPr/>
-        </p:nvSpPr>
-        <p:spPr>
-          <a:xfrm>
-            <a:off x="0" y="1432655"/>
-            <a:ext cx="12191999" cy="646331"/>
-          </a:xfrm>
-          <a:prstGeom prst="rect">
-            <a:avLst/>
-          </a:prstGeom>
-          <a:noFill/>
-          <a:ln>
-            <a:noFill/>
-          </a:ln>
-        </p:spPr>
-        <p:txBody>
-          <a:bodyPr anchorCtr="0" anchor="t" bIns="45700" lIns="91425" spcFirstLastPara="1" rIns="91425" wrap="square" tIns="45700">
-            <a:spAutoFit/>
-          </a:bodyPr>
-          <a:lstStyle/>
-          <a:p>
-            <a:pPr indent="0" lvl="0" marL="0" marR="0" rtl="0" algn="ctr">
-              <a:lnSpc>
-                <a:spcPct val="100000"/>
-              </a:lnSpc>
-              <a:spcBef>
-                <a:spcPts val="0"/>
-              </a:spcBef>
-              <a:spcAft>
-                <a:spcPts val="0"/>
-              </a:spcAft>
-              <a:buClr>
-                <a:srgbClr val="000000"/>
-              </a:buClr>
-              <a:buSzPts val="3600"/>
-              <a:buFont typeface="Arial"/>
-              <a:buNone/>
-            </a:pPr>
-            <a:r>
-              <a:rPr b="0" i="0" lang="es-MX" sz="3600" u="none" cap="none" strike="noStrike">
-                <a:solidFill>
-                  <a:schemeClr val="dk1"/>
-                </a:solidFill>
-                <a:latin typeface="Calibri"/>
-                <a:ea typeface="Calibri"/>
-                <a:cs typeface="Calibri"/>
-                <a:sym typeface="Calibri"/>
-              </a:rPr>
-              <a:t>Tecnologías utilizadas</a:t>
-            </a:r>
-            <a:endParaRPr b="0" i="0" sz="1400" u="none" cap="none" strike="noStrike">
-              <a:solidFill>
-                <a:srgbClr val="000000"/>
-              </a:solidFill>
-              <a:latin typeface="Arial"/>
-              <a:ea typeface="Arial"/>
-              <a:cs typeface="Arial"/>
-              <a:sym typeface="Arial"/>
-            </a:endParaRPr>
-          </a:p>
-        </p:txBody>
-      </p:sp>
-      <p:cxnSp>
-        <p:nvCxnSpPr>
-          <p:cNvPr id="235" name="Google Shape;235;p10"/>
-          <p:cNvCxnSpPr/>
-          <p:nvPr/>
-        </p:nvCxnSpPr>
-        <p:spPr>
-          <a:xfrm>
-            <a:off x="0" y="758027"/>
-            <a:ext cx="4085617" cy="0"/>
-          </a:xfrm>
-          <a:prstGeom prst="straightConnector1">
-            <a:avLst/>
-          </a:prstGeom>
-          <a:noFill/>
-          <a:ln cap="flat" cmpd="sng" w="15875">
-            <a:solidFill>
-              <a:srgbClr val="F5F7FC"/>
-            </a:solidFill>
-            <a:prstDash val="solid"/>
-            <a:miter lim="800000"/>
-            <a:headEnd len="sm" w="sm" type="none"/>
-            <a:tailEnd len="sm" w="sm" type="none"/>
-          </a:ln>
-        </p:spPr>
-      </p:cxnSp>
-    </p:spTree>
-  </p:cSld>
-  <p:clrMapOvr>
-    <a:masterClrMapping/>
-  </p:clrMapOvr>
-  <p:transition spd="slow">
-    <p:wipe dir="l"/>
-  </p:transition>
-</p:sld>
-</file>
-
-<file path=ppt/slides/slide18.xml><?xml version="1.0" encoding="utf-8"?>
-<p:sld xmlns:a="http://schemas.openxmlformats.org/drawingml/2006/main" xmlns:r="http://schemas.openxmlformats.org/officeDocument/2006/relationships" xmlns:mc="http://schemas.openxmlformats.org/markup-compatibility/2006" xmlns:mv="urn:schemas-microsoft-com:mac:vml" xmlns:p="http://schemas.openxmlformats.org/presentationml/2006/main" xmlns:c="http://schemas.openxmlformats.org/drawingml/2006/chart" xmlns:dgm="http://schemas.openxmlformats.org/drawingml/2006/diagram" xmlns:o="urn:schemas-microsoft-com:office:office" xmlns:v="urn:schemas-microsoft-com:vml" xmlns:pvml="urn:schemas-microsoft-com:office:powerpoint" xmlns:com="http://schemas.openxmlformats.org/drawingml/2006/compatibility" xmlns:p14="http://schemas.microsoft.com/office/powerpoint/2010/main" xmlns:p15="http://schemas.microsoft.com/office/powerpoint/2012/main" xmlns:ahyp="http://schemas.microsoft.com/office/drawing/2018/hyperlinkcolor" show="0">
-  <p:cSld>
-    <p:spTree>
-      <p:nvGrpSpPr>
-        <p:cNvPr id="239" name="Shape 239"/>
-        <p:cNvGrpSpPr/>
-        <p:nvPr/>
-      </p:nvGrpSpPr>
-      <p:grpSpPr>
-        <a:xfrm>
-          <a:off x="0" y="0"/>
-          <a:ext cx="0" cy="0"/>
-          <a:chOff x="0" y="0"/>
-          <a:chExt cx="0" cy="0"/>
-        </a:xfrm>
-      </p:grpSpPr>
-      <p:pic>
-        <p:nvPicPr>
-          <p:cNvPr descr="EscuelaIT Duoc UC - Escuela de Informática y Telecomunicaciones Duoc UC - Duoc  UC | LinkedIn" id="240" name="Google Shape;240;p11"/>
-          <p:cNvPicPr preferRelativeResize="0"/>
-          <p:nvPr/>
-        </p:nvPicPr>
-        <p:blipFill rotWithShape="1">
-          <a:blip r:embed="rId3">
-            <a:alphaModFix/>
-          </a:blip>
-          <a:srcRect b="0" l="0" r="0" t="0"/>
-          <a:stretch/>
-        </p:blipFill>
-        <p:spPr>
-          <a:xfrm>
-            <a:off x="8772152" y="207550"/>
-            <a:ext cx="3141406" cy="785352"/>
-          </a:xfrm>
-          <a:prstGeom prst="rect">
-            <a:avLst/>
-          </a:prstGeom>
-          <a:noFill/>
-          <a:ln>
-            <a:noFill/>
-          </a:ln>
-        </p:spPr>
-      </p:pic>
-      <p:sp>
-        <p:nvSpPr>
-          <p:cNvPr id="241" name="Google Shape;241;p11"/>
-          <p:cNvSpPr txBox="1"/>
-          <p:nvPr/>
-        </p:nvSpPr>
-        <p:spPr>
-          <a:xfrm>
-            <a:off x="1" y="2707792"/>
-            <a:ext cx="12191999" cy="1138773"/>
-          </a:xfrm>
-          <a:prstGeom prst="rect">
-            <a:avLst/>
-          </a:prstGeom>
-          <a:noFill/>
-          <a:ln>
-            <a:noFill/>
-          </a:ln>
-        </p:spPr>
-        <p:txBody>
-          <a:bodyPr anchorCtr="0" anchor="t" bIns="45700" lIns="91425" spcFirstLastPara="1" rIns="91425" wrap="square" tIns="45700">
-            <a:spAutoFit/>
-          </a:bodyPr>
-          <a:lstStyle/>
-          <a:p>
-            <a:pPr indent="0" lvl="0" marL="0" marR="0" rtl="0" algn="ctr">
-              <a:lnSpc>
-                <a:spcPct val="100000"/>
-              </a:lnSpc>
-              <a:spcBef>
-                <a:spcPts val="0"/>
-              </a:spcBef>
-              <a:spcAft>
-                <a:spcPts val="0"/>
-              </a:spcAft>
-              <a:buClr>
-                <a:srgbClr val="000000"/>
-              </a:buClr>
-              <a:buSzPts val="4400"/>
-              <a:buFont typeface="Arial"/>
-              <a:buNone/>
-            </a:pPr>
-            <a:r>
-              <a:rPr b="0" i="0" lang="es-MX" sz="4400" u="none" cap="none" strike="noStrike">
-                <a:solidFill>
-                  <a:schemeClr val="dk1"/>
-                </a:solidFill>
-                <a:latin typeface="Calibri"/>
-                <a:ea typeface="Calibri"/>
-                <a:cs typeface="Calibri"/>
-                <a:sym typeface="Calibri"/>
-              </a:rPr>
-              <a:t>DEMOSTRACIÓN DEL RESULTADO DEL PROYECTO</a:t>
-            </a:r>
-            <a:endParaRPr b="0" i="0" sz="1400" u="none" cap="none" strike="noStrike">
-              <a:solidFill>
-                <a:srgbClr val="000000"/>
-              </a:solidFill>
-              <a:latin typeface="Arial"/>
-              <a:ea typeface="Arial"/>
-              <a:cs typeface="Arial"/>
-              <a:sym typeface="Arial"/>
+              <a:latin typeface="Calibri"/>
+              <a:ea typeface="Calibri"/>
+              <a:cs typeface="Calibri"/>
+              <a:sym typeface="Calibri"/>
             </a:endParaRPr>
           </a:p>
           <a:p>
@@ -18380,25 +17713,16 @@
               <a:buClr>
                 <a:srgbClr val="000000"/>
               </a:buClr>
-              <a:buSzPts val="2400"/>
+              <a:buSzPts val="4400"/>
               <a:buFont typeface="Arial"/>
               <a:buNone/>
             </a:pPr>
             <a:r>
-              <a:rPr b="0" i="0" lang="es-MX" sz="2400" u="none" cap="none" strike="noStrike">
-                <a:solidFill>
-                  <a:srgbClr val="757070"/>
-                </a:solidFill>
-                <a:latin typeface="Calibri"/>
-                <a:ea typeface="Calibri"/>
-                <a:cs typeface="Calibri"/>
-                <a:sym typeface="Calibri"/>
-              </a:rPr>
-              <a:t>*Exposición del sistema</a:t>
+              <a:t/>
             </a:r>
-            <a:endParaRPr b="0" i="0" sz="2400" u="none" cap="none" strike="noStrike">
+            <a:endParaRPr sz="4400">
               <a:solidFill>
-                <a:srgbClr val="757070"/>
+                <a:schemeClr val="dk1"/>
               </a:solidFill>
               <a:latin typeface="Calibri"/>
               <a:ea typeface="Calibri"/>
@@ -18413,130 +17737,6 @@
   <p:clrMapOvr>
     <a:masterClrMapping/>
   </p:clrMapOvr>
-  <p:transition spd="slow">
-    <p:wipe dir="l"/>
-  </p:transition>
-</p:sld>
-</file>
-
-<file path=ppt/slides/slide19.xml><?xml version="1.0" encoding="utf-8"?>
-<p:sld xmlns:a="http://schemas.openxmlformats.org/drawingml/2006/main" xmlns:r="http://schemas.openxmlformats.org/officeDocument/2006/relationships" xmlns:mc="http://schemas.openxmlformats.org/markup-compatibility/2006" xmlns:mv="urn:schemas-microsoft-com:mac:vml" xmlns:p="http://schemas.openxmlformats.org/presentationml/2006/main" xmlns:c="http://schemas.openxmlformats.org/drawingml/2006/chart" xmlns:dgm="http://schemas.openxmlformats.org/drawingml/2006/diagram" xmlns:o="urn:schemas-microsoft-com:office:office" xmlns:v="urn:schemas-microsoft-com:vml" xmlns:pvml="urn:schemas-microsoft-com:office:powerpoint" xmlns:com="http://schemas.openxmlformats.org/drawingml/2006/compatibility" xmlns:p14="http://schemas.microsoft.com/office/powerpoint/2010/main" xmlns:p15="http://schemas.microsoft.com/office/powerpoint/2012/main" xmlns:ahyp="http://schemas.microsoft.com/office/drawing/2018/hyperlinkcolor" show="0">
-  <p:cSld>
-    <p:spTree>
-      <p:nvGrpSpPr>
-        <p:cNvPr id="245" name="Shape 245"/>
-        <p:cNvGrpSpPr/>
-        <p:nvPr/>
-      </p:nvGrpSpPr>
-      <p:grpSpPr>
-        <a:xfrm>
-          <a:off x="0" y="0"/>
-          <a:ext cx="0" cy="0"/>
-          <a:chOff x="0" y="0"/>
-          <a:chExt cx="0" cy="0"/>
-        </a:xfrm>
-      </p:grpSpPr>
-      <p:pic>
-        <p:nvPicPr>
-          <p:cNvPr descr="EscuelaIT Duoc UC - Escuela de Informática y Telecomunicaciones Duoc UC - Duoc  UC | LinkedIn" id="246" name="Google Shape;246;p12"/>
-          <p:cNvPicPr preferRelativeResize="0"/>
-          <p:nvPr/>
-        </p:nvPicPr>
-        <p:blipFill rotWithShape="1">
-          <a:blip r:embed="rId3">
-            <a:alphaModFix/>
-          </a:blip>
-          <a:srcRect b="0" l="0" r="0" t="0"/>
-          <a:stretch/>
-        </p:blipFill>
-        <p:spPr>
-          <a:xfrm>
-            <a:off x="8772152" y="207550"/>
-            <a:ext cx="3141406" cy="785352"/>
-          </a:xfrm>
-          <a:prstGeom prst="rect">
-            <a:avLst/>
-          </a:prstGeom>
-          <a:noFill/>
-          <a:ln>
-            <a:noFill/>
-          </a:ln>
-        </p:spPr>
-      </p:pic>
-      <p:sp>
-        <p:nvSpPr>
-          <p:cNvPr id="247" name="Google Shape;247;p12"/>
-          <p:cNvSpPr txBox="1"/>
-          <p:nvPr/>
-        </p:nvSpPr>
-        <p:spPr>
-          <a:xfrm>
-            <a:off x="1" y="1459095"/>
-            <a:ext cx="12191999" cy="769441"/>
-          </a:xfrm>
-          <a:prstGeom prst="rect">
-            <a:avLst/>
-          </a:prstGeom>
-          <a:noFill/>
-          <a:ln>
-            <a:noFill/>
-          </a:ln>
-        </p:spPr>
-        <p:txBody>
-          <a:bodyPr anchorCtr="0" anchor="t" bIns="45700" lIns="91425" spcFirstLastPara="1" rIns="91425" wrap="square" tIns="45700">
-            <a:spAutoFit/>
-          </a:bodyPr>
-          <a:lstStyle/>
-          <a:p>
-            <a:pPr indent="0" lvl="0" marL="0" marR="0" rtl="0" algn="ctr">
-              <a:lnSpc>
-                <a:spcPct val="100000"/>
-              </a:lnSpc>
-              <a:spcBef>
-                <a:spcPts val="0"/>
-              </a:spcBef>
-              <a:spcAft>
-                <a:spcPts val="0"/>
-              </a:spcAft>
-              <a:buClr>
-                <a:srgbClr val="000000"/>
-              </a:buClr>
-              <a:buSzPts val="4400"/>
-              <a:buFont typeface="Arial"/>
-              <a:buNone/>
-            </a:pPr>
-            <a:r>
-              <a:rPr b="0" i="0" lang="es-MX" sz="4400" u="none" cap="none" strike="noStrike">
-                <a:solidFill>
-                  <a:schemeClr val="dk1"/>
-                </a:solidFill>
-                <a:latin typeface="Calibri"/>
-                <a:ea typeface="Calibri"/>
-                <a:cs typeface="Calibri"/>
-                <a:sym typeface="Calibri"/>
-              </a:rPr>
-              <a:t>Resultados obtenidos</a:t>
-            </a:r>
-            <a:endParaRPr b="0" i="0" sz="1400" u="none" cap="none" strike="noStrike">
-              <a:solidFill>
-                <a:srgbClr val="000000"/>
-              </a:solidFill>
-              <a:latin typeface="Arial"/>
-              <a:ea typeface="Arial"/>
-              <a:cs typeface="Arial"/>
-              <a:sym typeface="Arial"/>
-            </a:endParaRPr>
-          </a:p>
-        </p:txBody>
-      </p:sp>
-    </p:spTree>
-  </p:cSld>
-  <p:clrMapOvr>
-    <a:masterClrMapping/>
-  </p:clrMapOvr>
-  <p:transition spd="slow">
-    <p:wipe dir="l"/>
-  </p:transition>
 </p:sld>
 </file>
 
@@ -19648,127 +18848,6 @@
           </a:ln>
         </p:spPr>
       </p:cxnSp>
-    </p:spTree>
-  </p:cSld>
-  <p:clrMapOvr>
-    <a:masterClrMapping/>
-  </p:clrMapOvr>
-  <p:transition spd="slow">
-    <p:wipe dir="l"/>
-  </p:transition>
-</p:sld>
-</file>
-
-<file path=ppt/slides/slide20.xml><?xml version="1.0" encoding="utf-8"?>
-<p:sld xmlns:a="http://schemas.openxmlformats.org/drawingml/2006/main" xmlns:r="http://schemas.openxmlformats.org/officeDocument/2006/relationships" xmlns:mc="http://schemas.openxmlformats.org/markup-compatibility/2006" xmlns:mv="urn:schemas-microsoft-com:mac:vml" xmlns:p="http://schemas.openxmlformats.org/presentationml/2006/main" xmlns:c="http://schemas.openxmlformats.org/drawingml/2006/chart" xmlns:dgm="http://schemas.openxmlformats.org/drawingml/2006/diagram" xmlns:o="urn:schemas-microsoft-com:office:office" xmlns:v="urn:schemas-microsoft-com:vml" xmlns:pvml="urn:schemas-microsoft-com:office:powerpoint" xmlns:com="http://schemas.openxmlformats.org/drawingml/2006/compatibility" xmlns:p14="http://schemas.microsoft.com/office/powerpoint/2010/main" xmlns:p15="http://schemas.microsoft.com/office/powerpoint/2012/main" xmlns:ahyp="http://schemas.microsoft.com/office/drawing/2018/hyperlinkcolor" show="0">
-  <p:cSld>
-    <p:spTree>
-      <p:nvGrpSpPr>
-        <p:cNvPr id="251" name="Shape 251"/>
-        <p:cNvGrpSpPr/>
-        <p:nvPr/>
-      </p:nvGrpSpPr>
-      <p:grpSpPr>
-        <a:xfrm>
-          <a:off x="0" y="0"/>
-          <a:ext cx="0" cy="0"/>
-          <a:chOff x="0" y="0"/>
-          <a:chExt cx="0" cy="0"/>
-        </a:xfrm>
-      </p:grpSpPr>
-      <p:pic>
-        <p:nvPicPr>
-          <p:cNvPr descr="EscuelaIT Duoc UC - Escuela de Informática y Telecomunicaciones Duoc UC - Duoc  UC | LinkedIn" id="252" name="Google Shape;252;p13"/>
-          <p:cNvPicPr preferRelativeResize="0"/>
-          <p:nvPr/>
-        </p:nvPicPr>
-        <p:blipFill rotWithShape="1">
-          <a:blip r:embed="rId3">
-            <a:alphaModFix/>
-          </a:blip>
-          <a:srcRect b="0" l="0" r="0" t="0"/>
-          <a:stretch/>
-        </p:blipFill>
-        <p:spPr>
-          <a:xfrm>
-            <a:off x="8772152" y="207550"/>
-            <a:ext cx="3141406" cy="785352"/>
-          </a:xfrm>
-          <a:prstGeom prst="rect">
-            <a:avLst/>
-          </a:prstGeom>
-          <a:noFill/>
-          <a:ln>
-            <a:noFill/>
-          </a:ln>
-        </p:spPr>
-      </p:pic>
-      <p:sp>
-        <p:nvSpPr>
-          <p:cNvPr id="253" name="Google Shape;253;p13"/>
-          <p:cNvSpPr txBox="1"/>
-          <p:nvPr/>
-        </p:nvSpPr>
-        <p:spPr>
-          <a:xfrm>
-            <a:off x="1" y="1360773"/>
-            <a:ext cx="12191999" cy="769441"/>
-          </a:xfrm>
-          <a:prstGeom prst="rect">
-            <a:avLst/>
-          </a:prstGeom>
-          <a:noFill/>
-          <a:ln>
-            <a:noFill/>
-          </a:ln>
-        </p:spPr>
-        <p:txBody>
-          <a:bodyPr anchorCtr="0" anchor="t" bIns="45700" lIns="91425" spcFirstLastPara="1" rIns="91425" wrap="square" tIns="45700">
-            <a:spAutoFit/>
-          </a:bodyPr>
-          <a:lstStyle/>
-          <a:p>
-            <a:pPr indent="0" lvl="0" marL="0" marR="0" rtl="0" algn="ctr">
-              <a:lnSpc>
-                <a:spcPct val="100000"/>
-              </a:lnSpc>
-              <a:spcBef>
-                <a:spcPts val="0"/>
-              </a:spcBef>
-              <a:spcAft>
-                <a:spcPts val="0"/>
-              </a:spcAft>
-              <a:buClr>
-                <a:srgbClr val="000000"/>
-              </a:buClr>
-              <a:buSzPts val="4400"/>
-              <a:buFont typeface="Arial"/>
-              <a:buNone/>
-            </a:pPr>
-            <a:r>
-              <a:rPr b="0" i="0" lang="es-MX" sz="4400" u="none" cap="none" strike="noStrike">
-                <a:solidFill>
-                  <a:schemeClr val="dk1"/>
-                </a:solidFill>
-                <a:latin typeface="Calibri"/>
-                <a:ea typeface="Calibri"/>
-                <a:cs typeface="Calibri"/>
-                <a:sym typeface="Calibri"/>
-              </a:rPr>
-              <a:t>Obstáculos presentados durante el desarrollo</a:t>
-            </a:r>
-            <a:endParaRPr b="0" i="0" sz="1400" u="none" cap="none" strike="noStrike">
-              <a:solidFill>
-                <a:srgbClr val="000000"/>
-              </a:solidFill>
-              <a:latin typeface="Arial"/>
-              <a:ea typeface="Arial"/>
-              <a:cs typeface="Arial"/>
-              <a:sym typeface="Arial"/>
-            </a:endParaRPr>
-          </a:p>
-        </p:txBody>
-      </p:sp>
     </p:spTree>
   </p:cSld>
   <p:clrMapOvr>
@@ -21519,86 +20598,6 @@
                 <a:cs typeface="Calibri"/>
                 <a:sym typeface="Calibri"/>
               </a:rPr>
-              <a:t>Consultar desde cualquier lugar cuánto deben o cuánto les deben.</a:t>
-            </a:r>
-            <a:endParaRPr b="0" i="0" sz="2000" u="none" cap="none" strike="noStrike">
-              <a:solidFill>
-                <a:schemeClr val="dk1"/>
-              </a:solidFill>
-              <a:latin typeface="Calibri"/>
-              <a:ea typeface="Calibri"/>
-              <a:cs typeface="Calibri"/>
-              <a:sym typeface="Calibri"/>
-            </a:endParaRPr>
-          </a:p>
-          <a:p>
-            <a:pPr indent="-355600" lvl="0" marL="457200" marR="0" rtl="0" algn="l">
-              <a:lnSpc>
-                <a:spcPct val="100000"/>
-              </a:lnSpc>
-              <a:spcBef>
-                <a:spcPts val="0"/>
-              </a:spcBef>
-              <a:spcAft>
-                <a:spcPts val="0"/>
-              </a:spcAft>
-              <a:buClr>
-                <a:schemeClr val="dk1"/>
-              </a:buClr>
-              <a:buSzPts val="2000"/>
-              <a:buFont typeface="Calibri"/>
-              <a:buChar char="●"/>
-            </a:pPr>
-            <a:r>
-              <a:rPr b="0" i="0" lang="es-MX" sz="2000" u="none" cap="none" strike="noStrike">
-                <a:solidFill>
-                  <a:schemeClr val="dk1"/>
-                </a:solidFill>
-                <a:latin typeface="Calibri"/>
-                <a:ea typeface="Calibri"/>
-                <a:cs typeface="Calibri"/>
-                <a:sym typeface="Calibri"/>
-              </a:rPr>
-              <a:t>Distribuir automáticamente cuánto debe pagar cada persona.</a:t>
-            </a:r>
-            <a:endParaRPr b="0" i="0" sz="2000" u="none" cap="none" strike="noStrike">
-              <a:solidFill>
-                <a:schemeClr val="dk1"/>
-              </a:solidFill>
-              <a:latin typeface="Calibri"/>
-              <a:ea typeface="Calibri"/>
-              <a:cs typeface="Calibri"/>
-              <a:sym typeface="Calibri"/>
-            </a:endParaRPr>
-          </a:p>
-          <a:p>
-            <a:pPr indent="-355600" lvl="0" marL="457200" marR="0" rtl="0" algn="l">
-              <a:lnSpc>
-                <a:spcPct val="100000"/>
-              </a:lnSpc>
-              <a:spcBef>
-                <a:spcPts val="0"/>
-              </a:spcBef>
-              <a:spcAft>
-                <a:spcPts val="0"/>
-              </a:spcAft>
-              <a:buClr>
-                <a:schemeClr val="dk1"/>
-              </a:buClr>
-              <a:buSzPts val="2000"/>
-              <a:buFont typeface="Calibri"/>
-              <a:buChar char="●"/>
-            </a:pPr>
-            <a:r>
-              <a:rPr b="0" i="0" lang="es-MX" sz="2000" u="none" cap="none" strike="noStrike">
-                <a:solidFill>
-                  <a:schemeClr val="dk1"/>
-                </a:solidFill>
-                <a:latin typeface="Calibri"/>
-                <a:ea typeface="Calibri"/>
-                <a:cs typeface="Calibri"/>
-                <a:sym typeface="Calibri"/>
-              </a:rPr>
               <a:t>Cada persona paga lo que realmente le corresponde, sin que alguien termine “poniendo más” de lo necesario.</a:t>
             </a:r>
             <a:endParaRPr b="0" i="0" sz="2000" u="none" cap="none" strike="noStrike">
@@ -22723,75 +21722,9 @@
           </a:p>
         </p:txBody>
       </p:sp>
-      <p:sp>
-        <p:nvSpPr>
-          <p:cNvPr id="148" name="Google Shape;148;p6"/>
-          <p:cNvSpPr txBox="1"/>
-          <p:nvPr/>
-        </p:nvSpPr>
-        <p:spPr>
-          <a:xfrm>
-            <a:off x="0" y="1095343"/>
-            <a:ext cx="12192000" cy="646500"/>
-          </a:xfrm>
-          <a:prstGeom prst="rect">
-            <a:avLst/>
-          </a:prstGeom>
-          <a:noFill/>
-          <a:ln>
-            <a:noFill/>
-          </a:ln>
-        </p:spPr>
-        <p:txBody>
-          <a:bodyPr anchorCtr="0" anchor="t" bIns="45700" lIns="91425" spcFirstLastPara="1" rIns="91425" wrap="square" tIns="45700">
-            <a:spAutoFit/>
-          </a:bodyPr>
-          <a:lstStyle/>
-          <a:p>
-            <a:pPr indent="0" lvl="0" marL="0" marR="0" rtl="0" algn="ctr">
-              <a:lnSpc>
-                <a:spcPct val="100000"/>
-              </a:lnSpc>
-              <a:spcBef>
-                <a:spcPts val="0"/>
-              </a:spcBef>
-              <a:spcAft>
-                <a:spcPts val="0"/>
-              </a:spcAft>
-              <a:buClr>
-                <a:srgbClr val="000000"/>
-              </a:buClr>
-              <a:buSzPts val="3600"/>
-              <a:buFont typeface="Arial"/>
-              <a:buNone/>
-            </a:pPr>
-            <a:r>
-              <a:rPr b="0" i="0" lang="es-MX" sz="3600" u="none" cap="none" strike="noStrike">
-                <a:solidFill>
-                  <a:schemeClr val="dk1"/>
-                </a:solidFill>
-                <a:latin typeface="Calibri"/>
-                <a:ea typeface="Calibri"/>
-                <a:cs typeface="Calibri"/>
-                <a:sym typeface="Calibri"/>
-              </a:rPr>
-              <a:t>Metodología de trabajo para el desarrollo del proyecto</a:t>
-            </a:r>
-            <a:endParaRPr b="0" i="0" sz="1800" u="none" cap="none" strike="noStrike">
-              <a:solidFill>
-                <a:schemeClr val="dk1"/>
-              </a:solidFill>
-              <a:latin typeface="Calibri"/>
-              <a:ea typeface="Calibri"/>
-              <a:cs typeface="Calibri"/>
-              <a:sym typeface="Calibri"/>
-            </a:endParaRPr>
-          </a:p>
-        </p:txBody>
-      </p:sp>
       <p:cxnSp>
         <p:nvCxnSpPr>
-          <p:cNvPr id="149" name="Google Shape;149;p6"/>
+          <p:cNvPr id="148" name="Google Shape;148;p6"/>
           <p:cNvCxnSpPr/>
           <p:nvPr/>
         </p:nvCxnSpPr>
@@ -22817,34 +21750,29 @@
       </p:cxnSp>
       <p:pic>
         <p:nvPicPr>
-          <p:cNvPr id="150" name="Google Shape;150;p6"/>
+          <p:cNvPr id="149" name="Google Shape;149;p6"/>
           <p:cNvPicPr preferRelativeResize="0"/>
           <p:nvPr/>
         </p:nvPicPr>
-        <p:blipFill rotWithShape="1">
+        <p:blipFill>
           <a:blip r:embed="rId4">
             <a:alphaModFix/>
           </a:blip>
-          <a:srcRect b="0" l="0" r="0" t="0"/>
-          <a:stretch/>
+          <a:stretch>
+            <a:fillRect/>
+          </a:stretch>
         </p:blipFill>
         <p:spPr>
           <a:xfrm>
-            <a:off x="1503337" y="1741850"/>
-            <a:ext cx="9185324" cy="4592650"/>
+            <a:off x="1196200" y="769125"/>
+            <a:ext cx="9086476" cy="5965650"/>
           </a:xfrm>
           <a:prstGeom prst="rect">
             <a:avLst/>
           </a:prstGeom>
           <a:noFill/>
-          <a:ln cap="flat" cmpd="sng" w="9525">
-            <a:solidFill>
-              <a:schemeClr val="dk2"/>
-            </a:solidFill>
-            <a:prstDash val="solid"/>
-            <a:round/>
-            <a:headEnd len="sm" w="sm" type="none"/>
-            <a:tailEnd len="sm" w="sm" type="none"/>
+          <a:ln>
+            <a:noFill/>
           </a:ln>
         </p:spPr>
       </p:pic>
@@ -22864,7 +21792,7 @@
   <p:cSld>
     <p:spTree>
       <p:nvGrpSpPr>
-        <p:cNvPr id="154" name="Shape 154"/>
+        <p:cNvPr id="153" name="Shape 153"/>
         <p:cNvGrpSpPr/>
         <p:nvPr/>
       </p:nvGrpSpPr>
@@ -22878,7 +21806,7 @@
       </p:grpSpPr>
       <p:pic>
         <p:nvPicPr>
-          <p:cNvPr descr="EscuelaIT Duoc UC - Escuela de Informática y Telecomunicaciones Duoc UC - Duoc  UC | LinkedIn" id="155" name="Google Shape;155;g37df52e5cc3_0_0"/>
+          <p:cNvPr descr="EscuelaIT Duoc UC - Escuela de Informática y Telecomunicaciones Duoc UC - Duoc  UC | LinkedIn" id="154" name="Google Shape;154;g3885b867a7c_0_32"/>
           <p:cNvPicPr preferRelativeResize="0"/>
           <p:nvPr/>
         </p:nvPicPr>
@@ -22905,7 +21833,7 @@
       </p:pic>
       <p:sp>
         <p:nvSpPr>
-          <p:cNvPr id="156" name="Google Shape;156;g37df52e5cc3_0_0"/>
+          <p:cNvPr id="155" name="Google Shape;155;g3885b867a7c_0_32"/>
           <p:cNvSpPr txBox="1"/>
           <p:nvPr/>
         </p:nvSpPr>
@@ -22971,13 +21899,13 @@
       </p:sp>
       <p:sp>
         <p:nvSpPr>
-          <p:cNvPr id="157" name="Google Shape;157;g37df52e5cc3_0_0"/>
+          <p:cNvPr id="156" name="Google Shape;156;g3885b867a7c_0_32"/>
           <p:cNvSpPr txBox="1"/>
           <p:nvPr/>
         </p:nvSpPr>
         <p:spPr>
           <a:xfrm>
-            <a:off x="0" y="1095343"/>
+            <a:off x="0" y="664842"/>
             <a:ext cx="12192000" cy="646500"/>
           </a:xfrm>
           <a:prstGeom prst="rect">
@@ -23037,7 +21965,7 @@
       </p:sp>
       <p:cxnSp>
         <p:nvCxnSpPr>
-          <p:cNvPr id="158" name="Google Shape;158;g37df52e5cc3_0_0"/>
+          <p:cNvPr id="157" name="Google Shape;157;g3885b867a7c_0_32"/>
           <p:cNvCxnSpPr/>
           <p:nvPr/>
         </p:nvCxnSpPr>
@@ -23063,34 +21991,29 @@
       </p:cxnSp>
       <p:pic>
         <p:nvPicPr>
-          <p:cNvPr id="159" name="Google Shape;159;g37df52e5cc3_0_0"/>
+          <p:cNvPr id="158" name="Google Shape;158;g3885b867a7c_0_32"/>
           <p:cNvPicPr preferRelativeResize="0"/>
           <p:nvPr/>
         </p:nvPicPr>
-        <p:blipFill rotWithShape="1">
+        <p:blipFill>
           <a:blip r:embed="rId4">
             <a:alphaModFix/>
           </a:blip>
-          <a:srcRect b="0" l="0" r="0" t="0"/>
-          <a:stretch/>
+          <a:stretch>
+            <a:fillRect/>
+          </a:stretch>
         </p:blipFill>
         <p:spPr>
           <a:xfrm>
-            <a:off x="1524000" y="1844292"/>
-            <a:ext cx="8833352" cy="4811357"/>
+            <a:off x="1028800" y="1311350"/>
+            <a:ext cx="9765775" cy="5379874"/>
           </a:xfrm>
           <a:prstGeom prst="rect">
             <a:avLst/>
           </a:prstGeom>
           <a:noFill/>
-          <a:ln cap="flat" cmpd="sng" w="9525">
-            <a:solidFill>
-              <a:schemeClr val="dk2"/>
-            </a:solidFill>
-            <a:prstDash val="solid"/>
-            <a:round/>
-            <a:headEnd len="sm" w="sm" type="none"/>
-            <a:tailEnd len="sm" w="sm" type="none"/>
+          <a:ln>
+            <a:noFill/>
           </a:ln>
         </p:spPr>
       </p:pic>
@@ -23107,7 +22030,7 @@
   <p:cSld>
     <p:spTree>
       <p:nvGrpSpPr>
-        <p:cNvPr id="163" name="Shape 163"/>
+        <p:cNvPr id="162" name="Shape 162"/>
         <p:cNvGrpSpPr/>
         <p:nvPr/>
       </p:nvGrpSpPr>
@@ -23121,7 +22044,7 @@
       </p:grpSpPr>
       <p:pic>
         <p:nvPicPr>
-          <p:cNvPr descr="EscuelaIT Duoc UC - Escuela de Informática y Telecomunicaciones Duoc UC - Duoc  UC | LinkedIn" id="164" name="Google Shape;164;g3885b867a7c_0_32"/>
+          <p:cNvPr descr="EscuelaIT Duoc UC - Escuela de Informática y Telecomunicaciones Duoc UC - Duoc  UC | LinkedIn" id="163" name="Google Shape;163;g3885b867a7c_0_24"/>
           <p:cNvPicPr preferRelativeResize="0"/>
           <p:nvPr/>
         </p:nvPicPr>
@@ -23148,7 +22071,7 @@
       </p:pic>
       <p:sp>
         <p:nvSpPr>
-          <p:cNvPr id="165" name="Google Shape;165;g3885b867a7c_0_32"/>
+          <p:cNvPr id="164" name="Google Shape;164;g3885b867a7c_0_24"/>
           <p:cNvSpPr txBox="1"/>
           <p:nvPr/>
         </p:nvSpPr>
@@ -23214,13 +22137,13 @@
       </p:sp>
       <p:sp>
         <p:nvSpPr>
-          <p:cNvPr id="166" name="Google Shape;166;g3885b867a7c_0_32"/>
+          <p:cNvPr id="165" name="Google Shape;165;g3885b867a7c_0_24"/>
           <p:cNvSpPr txBox="1"/>
           <p:nvPr/>
         </p:nvSpPr>
         <p:spPr>
           <a:xfrm>
-            <a:off x="0" y="664842"/>
+            <a:off x="-29225" y="1054430"/>
             <a:ext cx="12192000" cy="646500"/>
           </a:xfrm>
           <a:prstGeom prst="rect">
@@ -23266,7 +22189,7 @@
               </a:rPr>
               <a:t>Release Plan</a:t>
             </a:r>
-            <a:endParaRPr b="0" i="0" sz="1800" u="none" cap="none" strike="noStrike">
+            <a:endParaRPr b="0" i="0" sz="3600" u="none" cap="none" strike="noStrike">
               <a:solidFill>
                 <a:schemeClr val="dk1"/>
               </a:solidFill>
@@ -23280,7 +22203,7 @@
       </p:sp>
       <p:cxnSp>
         <p:nvCxnSpPr>
-          <p:cNvPr id="167" name="Google Shape;167;g3885b867a7c_0_32"/>
+          <p:cNvPr id="166" name="Google Shape;166;g3885b867a7c_0_24"/>
           <p:cNvCxnSpPr/>
           <p:nvPr/>
         </p:nvCxnSpPr>
@@ -23306,7 +22229,7 @@
       </p:cxnSp>
       <p:pic>
         <p:nvPicPr>
-          <p:cNvPr id="168" name="Google Shape;168;g3885b867a7c_0_32" title="2.jpg"/>
+          <p:cNvPr id="167" name="Google Shape;167;g3885b867a7c_0_24" title="3.jpg"/>
           <p:cNvPicPr preferRelativeResize="0"/>
           <p:nvPr/>
         </p:nvPicPr>
@@ -23320,8 +22243,8 @@
         </p:blipFill>
         <p:spPr>
           <a:xfrm>
-            <a:off x="1301837" y="1411300"/>
-            <a:ext cx="9860726" cy="5546651"/>
+            <a:off x="136200" y="1986230"/>
+            <a:ext cx="5857598" cy="3294899"/>
           </a:xfrm>
           <a:prstGeom prst="rect">
             <a:avLst/>
@@ -23338,6 +22261,34 @@
           </a:ln>
         </p:spPr>
       </p:pic>
+      <p:pic>
+        <p:nvPicPr>
+          <p:cNvPr id="168" name="Google Shape;168;g3885b867a7c_0_24"/>
+          <p:cNvPicPr preferRelativeResize="0"/>
+          <p:nvPr/>
+        </p:nvPicPr>
+        <p:blipFill>
+          <a:blip r:embed="rId5">
+            <a:alphaModFix/>
+          </a:blip>
+          <a:stretch>
+            <a:fillRect/>
+          </a:stretch>
+        </p:blipFill>
+        <p:spPr>
+          <a:xfrm>
+            <a:off x="6146198" y="1853330"/>
+            <a:ext cx="5893402" cy="3265770"/>
+          </a:xfrm>
+          <a:prstGeom prst="rect">
+            <a:avLst/>
+          </a:prstGeom>
+          <a:noFill/>
+          <a:ln>
+            <a:noFill/>
+          </a:ln>
+        </p:spPr>
+      </p:pic>
     </p:spTree>
   </p:cSld>
   <p:clrMapOvr>
@@ -23347,6 +22298,285 @@
 </file>
 
 <file path=ppt/theme/theme1.xml><?xml version="1.0" encoding="utf-8"?>
+<a:theme xmlns:a="http://schemas.openxmlformats.org/drawingml/2006/main" xmlns:r="http://schemas.openxmlformats.org/officeDocument/2006/relationships" name="Tema de Office">
+  <a:themeElements>
+    <a:clrScheme name="Office">
+      <a:dk1>
+        <a:srgbClr val="000000"/>
+      </a:dk1>
+      <a:lt1>
+        <a:srgbClr val="FFFFFF"/>
+      </a:lt1>
+      <a:dk2>
+        <a:srgbClr val="FFE599"/>
+      </a:dk2>
+      <a:lt2>
+        <a:srgbClr val="E7E6E6"/>
+      </a:lt2>
+      <a:accent1>
+        <a:srgbClr val="4472C4"/>
+      </a:accent1>
+      <a:accent2>
+        <a:srgbClr val="ED7D31"/>
+      </a:accent2>
+      <a:accent3>
+        <a:srgbClr val="A5A5A5"/>
+      </a:accent3>
+      <a:accent4>
+        <a:srgbClr val="FFC000"/>
+      </a:accent4>
+      <a:accent5>
+        <a:srgbClr val="5B9BD5"/>
+      </a:accent5>
+      <a:accent6>
+        <a:srgbClr val="70AD47"/>
+      </a:accent6>
+      <a:hlink>
+        <a:srgbClr val="0563C1"/>
+      </a:hlink>
+      <a:folHlink>
+        <a:srgbClr val="954F72"/>
+      </a:folHlink>
+    </a:clrScheme>
+    <a:fontScheme name="Office">
+      <a:majorFont>
+        <a:latin typeface="Arial"/>
+        <a:ea typeface=""/>
+        <a:cs typeface=""/>
+        <a:font script="Jpan" typeface="ＭＳ Ｐゴシック"/>
+        <a:font script="Hang" typeface="맑은 고딕"/>
+        <a:font script="Hans" typeface="宋体"/>
+        <a:font script="Hant" typeface="新細明體"/>
+        <a:font script="Arab" typeface="Times New Roman"/>
+        <a:font script="Hebr" typeface="Times New Roman"/>
+        <a:font script="Thai" typeface="Angsana New"/>
+        <a:font script="Ethi" typeface="Nyala"/>
+        <a:font script="Beng" typeface="Vrinda"/>
+        <a:font script="Gujr" typeface="Shruti"/>
+        <a:font script="Khmr" typeface="MoolBoran"/>
+        <a:font script="Knda" typeface="Tunga"/>
+        <a:font script="Guru" typeface="Raavi"/>
+        <a:font script="Cans" typeface="Euphemia"/>
+        <a:font script="Cher" typeface="Plantagenet Cherokee"/>
+        <a:font script="Yiii" typeface="Microsoft Yi Baiti"/>
+        <a:font script="Tibt" typeface="Microsoft Himalaya"/>
+        <a:font script="Thaa" typeface="MV Boli"/>
+        <a:font script="Deva" typeface="Mangal"/>
+        <a:font script="Telu" typeface="Gautami"/>
+        <a:font script="Taml" typeface="Latha"/>
+        <a:font script="Syrc" typeface="Estrangelo Edessa"/>
+        <a:font script="Orya" typeface="Kalinga"/>
+        <a:font script="Mlym" typeface="Kartika"/>
+        <a:font script="Laoo" typeface="DokChampa"/>
+        <a:font script="Sinh" typeface="Iskoola Pota"/>
+        <a:font script="Mong" typeface="Mongolian Baiti"/>
+        <a:font script="Viet" typeface="Times New Roman"/>
+        <a:font script="Uigh" typeface="Microsoft Uighur"/>
+        <a:font script="Geor" typeface="Sylfaen"/>
+      </a:majorFont>
+      <a:minorFont>
+        <a:latin typeface="Arial"/>
+        <a:ea typeface=""/>
+        <a:cs typeface=""/>
+        <a:font script="Jpan" typeface="ＭＳ Ｐゴシック"/>
+        <a:font script="Hang" typeface="맑은 고딕"/>
+        <a:font script="Hans" typeface="宋体"/>
+        <a:font script="Hant" typeface="新細明體"/>
+        <a:font script="Arab" typeface="Arial"/>
+        <a:font script="Hebr" typeface="Arial"/>
+        <a:font script="Thai" typeface="Cordia New"/>
+        <a:font script="Ethi" typeface="Nyala"/>
+        <a:font script="Beng" typeface="Vrinda"/>
+        <a:font script="Gujr" typeface="Shruti"/>
+        <a:font script="Khmr" typeface="DaunPenh"/>
+        <a:font script="Knda" typeface="Tunga"/>
+        <a:font script="Guru" typeface="Raavi"/>
+        <a:font script="Cans" typeface="Euphemia"/>
+        <a:font script="Cher" typeface="Plantagenet Cherokee"/>
+        <a:font script="Yiii" typeface="Microsoft Yi Baiti"/>
+        <a:font script="Tibt" typeface="Microsoft Himalaya"/>
+        <a:font script="Thaa" typeface="MV Boli"/>
+        <a:font script="Deva" typeface="Mangal"/>
+        <a:font script="Telu" typeface="Gautami"/>
+        <a:font script="Taml" typeface="Latha"/>
+        <a:font script="Syrc" typeface="Estrangelo Edessa"/>
+        <a:font script="Orya" typeface="Kalinga"/>
+        <a:font script="Mlym" typeface="Kartika"/>
+        <a:font script="Laoo" typeface="DokChampa"/>
+        <a:font script="Sinh" typeface="Iskoola Pota"/>
+        <a:font script="Mong" typeface="Mongolian Baiti"/>
+        <a:font script="Viet" typeface="Arial"/>
+        <a:font script="Uigh" typeface="Microsoft Uighur"/>
+        <a:font script="Geor" typeface="Sylfaen"/>
+      </a:minorFont>
+    </a:fontScheme>
+    <a:fmtScheme name="Office">
+      <a:fillStyleLst>
+        <a:solidFill>
+          <a:schemeClr val="phClr"/>
+        </a:solidFill>
+        <a:gradFill rotWithShape="1">
+          <a:gsLst>
+            <a:gs pos="0">
+              <a:schemeClr val="phClr">
+                <a:tint val="50000"/>
+                <a:satMod val="300000"/>
+              </a:schemeClr>
+            </a:gs>
+            <a:gs pos="35000">
+              <a:schemeClr val="phClr">
+                <a:tint val="37000"/>
+                <a:satMod val="300000"/>
+              </a:schemeClr>
+            </a:gs>
+            <a:gs pos="100000">
+              <a:schemeClr val="phClr">
+                <a:tint val="15000"/>
+                <a:satMod val="350000"/>
+              </a:schemeClr>
+            </a:gs>
+          </a:gsLst>
+          <a:lin ang="16200000" scaled="1"/>
+        </a:gradFill>
+        <a:gradFill rotWithShape="1">
+          <a:gsLst>
+            <a:gs pos="0">
+              <a:schemeClr val="phClr">
+                <a:tint val="100000"/>
+                <a:shade val="100000"/>
+                <a:satMod val="130000"/>
+              </a:schemeClr>
+            </a:gs>
+            <a:gs pos="100000">
+              <a:schemeClr val="phClr">
+                <a:tint val="50000"/>
+                <a:shade val="100000"/>
+                <a:satMod val="350000"/>
+              </a:schemeClr>
+            </a:gs>
+          </a:gsLst>
+          <a:lin ang="16200000" scaled="0"/>
+        </a:gradFill>
+      </a:fillStyleLst>
+      <a:lnStyleLst>
+        <a:ln w="9525" cap="flat" cmpd="sng" algn="ctr">
+          <a:solidFill>
+            <a:schemeClr val="phClr">
+              <a:shade val="95000"/>
+              <a:satMod val="105000"/>
+            </a:schemeClr>
+          </a:solidFill>
+          <a:prstDash val="solid"/>
+        </a:ln>
+        <a:ln w="25400" cap="flat" cmpd="sng" algn="ctr">
+          <a:solidFill>
+            <a:schemeClr val="phClr"/>
+          </a:solidFill>
+          <a:prstDash val="solid"/>
+        </a:ln>
+        <a:ln w="38100" cap="flat" cmpd="sng" algn="ctr">
+          <a:solidFill>
+            <a:schemeClr val="phClr"/>
+          </a:solidFill>
+          <a:prstDash val="solid"/>
+        </a:ln>
+      </a:lnStyleLst>
+      <a:effectStyleLst>
+        <a:effectStyle>
+          <a:effectLst>
+            <a:outerShdw blurRad="40000" dist="20000" dir="5400000" rotWithShape="0">
+              <a:srgbClr val="000000">
+                <a:alpha val="38000"/>
+              </a:srgbClr>
+            </a:outerShdw>
+          </a:effectLst>
+        </a:effectStyle>
+        <a:effectStyle>
+          <a:effectLst>
+            <a:outerShdw blurRad="40000" dist="23000" dir="5400000" rotWithShape="0">
+              <a:srgbClr val="000000">
+                <a:alpha val="35000"/>
+              </a:srgbClr>
+            </a:outerShdw>
+          </a:effectLst>
+        </a:effectStyle>
+        <a:effectStyle>
+          <a:effectLst>
+            <a:outerShdw blurRad="40000" dist="23000" dir="5400000" rotWithShape="0">
+              <a:srgbClr val="000000">
+                <a:alpha val="35000"/>
+              </a:srgbClr>
+            </a:outerShdw>
+          </a:effectLst>
+          <a:scene3d>
+            <a:camera prst="orthographicFront">
+              <a:rot lat="0" lon="0" rev="0"/>
+            </a:camera>
+            <a:lightRig rig="threePt" dir="t">
+              <a:rot lat="0" lon="0" rev="1200000"/>
+            </a:lightRig>
+          </a:scene3d>
+          <a:sp3d>
+            <a:bevelT w="63500" h="25400"/>
+          </a:sp3d>
+        </a:effectStyle>
+      </a:effectStyleLst>
+      <a:bgFillStyleLst>
+        <a:solidFill>
+          <a:schemeClr val="phClr"/>
+        </a:solidFill>
+        <a:gradFill rotWithShape="1">
+          <a:gsLst>
+            <a:gs pos="0">
+              <a:schemeClr val="phClr">
+                <a:tint val="40000"/>
+                <a:satMod val="350000"/>
+              </a:schemeClr>
+            </a:gs>
+            <a:gs pos="40000">
+              <a:schemeClr val="phClr">
+                <a:tint val="45000"/>
+                <a:shade val="99000"/>
+                <a:satMod val="350000"/>
+              </a:schemeClr>
+            </a:gs>
+            <a:gs pos="100000">
+              <a:schemeClr val="phClr">
+                <a:shade val="20000"/>
+                <a:satMod val="255000"/>
+              </a:schemeClr>
+            </a:gs>
+          </a:gsLst>
+          <a:path path="circle">
+            <a:fillToRect l="50000" t="-80000" r="50000" b="180000"/>
+          </a:path>
+        </a:gradFill>
+        <a:gradFill rotWithShape="1">
+          <a:gsLst>
+            <a:gs pos="0">
+              <a:schemeClr val="phClr">
+                <a:tint val="80000"/>
+                <a:satMod val="300000"/>
+              </a:schemeClr>
+            </a:gs>
+            <a:gs pos="100000">
+              <a:schemeClr val="phClr">
+                <a:shade val="30000"/>
+                <a:satMod val="200000"/>
+              </a:schemeClr>
+            </a:gs>
+          </a:gsLst>
+          <a:path path="circle">
+            <a:fillToRect l="50000" t="50000" r="50000" b="50000"/>
+          </a:path>
+        </a:gradFill>
+      </a:bgFillStyleLst>
+    </a:fmtScheme>
+  </a:themeElements>
+</a:theme>
+</file>
+
+<file path=ppt/theme/theme2.xml><?xml version="1.0" encoding="utf-8"?>
 <a:theme xmlns:a="http://schemas.openxmlformats.org/drawingml/2006/main" xmlns:r="http://schemas.openxmlformats.org/officeDocument/2006/relationships">
   <a:themeElements>
     <a:clrScheme name="Default">
@@ -23623,283 +22853,4 @@
     </a:fmtScheme>
   </a:themeElements>
 </a:theme>
-</file>
-
-<file path=ppt/theme/theme2.xml><?xml version="1.0" encoding="utf-8"?>
-<a:theme xmlns:a="http://schemas.openxmlformats.org/drawingml/2006/main" xmlns:r="http://schemas.openxmlformats.org/officeDocument/2006/relationships" name="Tema de Office">
-  <a:themeElements>
-    <a:clrScheme name="Office">
-      <a:dk1>
-        <a:srgbClr val="000000"/>
-      </a:dk1>
-      <a:lt1>
-        <a:srgbClr val="FFFFFF"/>
-      </a:lt1>
-      <a:dk2>
-        <a:srgbClr val="FFE599"/>
-      </a:dk2>
-      <a:lt2>
-        <a:srgbClr val="E7E6E6"/>
-      </a:lt2>
-      <a:accent1>
-        <a:srgbClr val="4472C4"/>
-      </a:accent1>
-      <a:accent2>
-        <a:srgbClr val="ED7D31"/>
-      </a:accent2>
-      <a:accent3>
-        <a:srgbClr val="A5A5A5"/>
-      </a:accent3>
-      <a:accent4>
-        <a:srgbClr val="FFC000"/>
-      </a:accent4>
-      <a:accent5>
-        <a:srgbClr val="5B9BD5"/>
-      </a:accent5>
-      <a:accent6>
-        <a:srgbClr val="70AD47"/>
-      </a:accent6>
-      <a:hlink>
-        <a:srgbClr val="0563C1"/>
-      </a:hlink>
-      <a:folHlink>
-        <a:srgbClr val="954F72"/>
-      </a:folHlink>
-    </a:clrScheme>
-    <a:fontScheme name="Office">
-      <a:majorFont>
-        <a:latin typeface="Arial"/>
-        <a:ea typeface=""/>
-        <a:cs typeface=""/>
-        <a:font script="Jpan" typeface="ＭＳ Ｐゴシック"/>
-        <a:font script="Hang" typeface="맑은 고딕"/>
-        <a:font script="Hans" typeface="宋体"/>
-        <a:font script="Hant" typeface="新細明體"/>
-        <a:font script="Arab" typeface="Times New Roman"/>
-        <a:font script="Hebr" typeface="Times New Roman"/>
-        <a:font script="Thai" typeface="Angsana New"/>
-        <a:font script="Ethi" typeface="Nyala"/>
-        <a:font script="Beng" typeface="Vrinda"/>
-        <a:font script="Gujr" typeface="Shruti"/>
-        <a:font script="Khmr" typeface="MoolBoran"/>
-        <a:font script="Knda" typeface="Tunga"/>
-        <a:font script="Guru" typeface="Raavi"/>
-        <a:font script="Cans" typeface="Euphemia"/>
-        <a:font script="Cher" typeface="Plantagenet Cherokee"/>
-        <a:font script="Yiii" typeface="Microsoft Yi Baiti"/>
-        <a:font script="Tibt" typeface="Microsoft Himalaya"/>
-        <a:font script="Thaa" typeface="MV Boli"/>
-        <a:font script="Deva" typeface="Mangal"/>
-        <a:font script="Telu" typeface="Gautami"/>
-        <a:font script="Taml" typeface="Latha"/>
-        <a:font script="Syrc" typeface="Estrangelo Edessa"/>
-        <a:font script="Orya" typeface="Kalinga"/>
-        <a:font script="Mlym" typeface="Kartika"/>
-        <a:font script="Laoo" typeface="DokChampa"/>
-        <a:font script="Sinh" typeface="Iskoola Pota"/>
-        <a:font script="Mong" typeface="Mongolian Baiti"/>
-        <a:font script="Viet" typeface="Times New Roman"/>
-        <a:font script="Uigh" typeface="Microsoft Uighur"/>
-        <a:font script="Geor" typeface="Sylfaen"/>
-      </a:majorFont>
-      <a:minorFont>
-        <a:latin typeface="Arial"/>
-        <a:ea typeface=""/>
-        <a:cs typeface=""/>
-        <a:font script="Jpan" typeface="ＭＳ Ｐゴシック"/>
-        <a:font script="Hang" typeface="맑은 고딕"/>
-        <a:font script="Hans" typeface="宋体"/>
-        <a:font script="Hant" typeface="新細明體"/>
-        <a:font script="Arab" typeface="Arial"/>
-        <a:font script="Hebr" typeface="Arial"/>
-        <a:font script="Thai" typeface="Cordia New"/>
-        <a:font script="Ethi" typeface="Nyala"/>
-        <a:font script="Beng" typeface="Vrinda"/>
-        <a:font script="Gujr" typeface="Shruti"/>
-        <a:font script="Khmr" typeface="DaunPenh"/>
-        <a:font script="Knda" typeface="Tunga"/>
-        <a:font script="Guru" typeface="Raavi"/>
-        <a:font script="Cans" typeface="Euphemia"/>
-        <a:font script="Cher" typeface="Plantagenet Cherokee"/>
-        <a:font script="Yiii" typeface="Microsoft Yi Baiti"/>
-        <a:font script="Tibt" typeface="Microsoft Himalaya"/>
-        <a:font script="Thaa" typeface="MV Boli"/>
-        <a:font script="Deva" typeface="Mangal"/>
-        <a:font script="Telu" typeface="Gautami"/>
-        <a:font script="Taml" typeface="Latha"/>
-        <a:font script="Syrc" typeface="Estrangelo Edessa"/>
-        <a:font script="Orya" typeface="Kalinga"/>
-        <a:font script="Mlym" typeface="Kartika"/>
-        <a:font script="Laoo" typeface="DokChampa"/>
-        <a:font script="Sinh" typeface="Iskoola Pota"/>
-        <a:font script="Mong" typeface="Mongolian Baiti"/>
-        <a:font script="Viet" typeface="Arial"/>
-        <a:font script="Uigh" typeface="Microsoft Uighur"/>
-        <a:font script="Geor" typeface="Sylfaen"/>
-      </a:minorFont>
-    </a:fontScheme>
-    <a:fmtScheme name="Office">
-      <a:fillStyleLst>
-        <a:solidFill>
-          <a:schemeClr val="phClr"/>
-        </a:solidFill>
-        <a:gradFill rotWithShape="1">
-          <a:gsLst>
-            <a:gs pos="0">
-              <a:schemeClr val="phClr">
-                <a:tint val="50000"/>
-                <a:satMod val="300000"/>
-              </a:schemeClr>
-            </a:gs>
-            <a:gs pos="35000">
-              <a:schemeClr val="phClr">
-                <a:tint val="37000"/>
-                <a:satMod val="300000"/>
-              </a:schemeClr>
-            </a:gs>
-            <a:gs pos="100000">
-              <a:schemeClr val="phClr">
-                <a:tint val="15000"/>
-                <a:satMod val="350000"/>
-              </a:schemeClr>
-            </a:gs>
-          </a:gsLst>
-          <a:lin ang="16200000" scaled="1"/>
-        </a:gradFill>
-        <a:gradFill rotWithShape="1">
-          <a:gsLst>
-            <a:gs pos="0">
-              <a:schemeClr val="phClr">
-                <a:tint val="100000"/>
-                <a:shade val="100000"/>
-                <a:satMod val="130000"/>
-              </a:schemeClr>
-            </a:gs>
-            <a:gs pos="100000">
-              <a:schemeClr val="phClr">
-                <a:tint val="50000"/>
-                <a:shade val="100000"/>
-                <a:satMod val="350000"/>
-              </a:schemeClr>
-            </a:gs>
-          </a:gsLst>
-          <a:lin ang="16200000" scaled="0"/>
-        </a:gradFill>
-      </a:fillStyleLst>
-      <a:lnStyleLst>
-        <a:ln w="9525" cap="flat" cmpd="sng" algn="ctr">
-          <a:solidFill>
-            <a:schemeClr val="phClr">
-              <a:shade val="95000"/>
-              <a:satMod val="105000"/>
-            </a:schemeClr>
-          </a:solidFill>
-          <a:prstDash val="solid"/>
-        </a:ln>
-        <a:ln w="25400" cap="flat" cmpd="sng" algn="ctr">
-          <a:solidFill>
-            <a:schemeClr val="phClr"/>
-          </a:solidFill>
-          <a:prstDash val="solid"/>
-        </a:ln>
-        <a:ln w="38100" cap="flat" cmpd="sng" algn="ctr">
-          <a:solidFill>
-            <a:schemeClr val="phClr"/>
-          </a:solidFill>
-          <a:prstDash val="solid"/>
-        </a:ln>
-      </a:lnStyleLst>
-      <a:effectStyleLst>
-        <a:effectStyle>
-          <a:effectLst>
-            <a:outerShdw blurRad="40000" dist="20000" dir="5400000" rotWithShape="0">
-              <a:srgbClr val="000000">
-                <a:alpha val="38000"/>
-              </a:srgbClr>
-            </a:outerShdw>
-          </a:effectLst>
-        </a:effectStyle>
-        <a:effectStyle>
-          <a:effectLst>
-            <a:outerShdw blurRad="40000" dist="23000" dir="5400000" rotWithShape="0">
-              <a:srgbClr val="000000">
-                <a:alpha val="35000"/>
-              </a:srgbClr>
-            </a:outerShdw>
-          </a:effectLst>
-        </a:effectStyle>
-        <a:effectStyle>
-          <a:effectLst>
-            <a:outerShdw blurRad="40000" dist="23000" dir="5400000" rotWithShape="0">
-              <a:srgbClr val="000000">
-                <a:alpha val="35000"/>
-              </a:srgbClr>
-            </a:outerShdw>
-          </a:effectLst>
-          <a:scene3d>
-            <a:camera prst="orthographicFront">
-              <a:rot lat="0" lon="0" rev="0"/>
-            </a:camera>
-            <a:lightRig rig="threePt" dir="t">
-              <a:rot lat="0" lon="0" rev="1200000"/>
-            </a:lightRig>
-          </a:scene3d>
-          <a:sp3d>
-            <a:bevelT w="63500" h="25400"/>
-          </a:sp3d>
-        </a:effectStyle>
-      </a:effectStyleLst>
-      <a:bgFillStyleLst>
-        <a:solidFill>
-          <a:schemeClr val="phClr"/>
-        </a:solidFill>
-        <a:gradFill rotWithShape="1">
-          <a:gsLst>
-            <a:gs pos="0">
-              <a:schemeClr val="phClr">
-                <a:tint val="40000"/>
-                <a:satMod val="350000"/>
-              </a:schemeClr>
-            </a:gs>
-            <a:gs pos="40000">
-              <a:schemeClr val="phClr">
-                <a:tint val="45000"/>
-                <a:shade val="99000"/>
-                <a:satMod val="350000"/>
-              </a:schemeClr>
-            </a:gs>
-            <a:gs pos="100000">
-              <a:schemeClr val="phClr">
-                <a:shade val="20000"/>
-                <a:satMod val="255000"/>
-              </a:schemeClr>
-            </a:gs>
-          </a:gsLst>
-          <a:path path="circle">
-            <a:fillToRect l="50000" t="-80000" r="50000" b="180000"/>
-          </a:path>
-        </a:gradFill>
-        <a:gradFill rotWithShape="1">
-          <a:gsLst>
-            <a:gs pos="0">
-              <a:schemeClr val="phClr">
-                <a:tint val="80000"/>
-                <a:satMod val="300000"/>
-              </a:schemeClr>
-            </a:gs>
-            <a:gs pos="100000">
-              <a:schemeClr val="phClr">
-                <a:shade val="30000"/>
-                <a:satMod val="200000"/>
-              </a:schemeClr>
-            </a:gs>
-          </a:gsLst>
-          <a:path path="circle">
-            <a:fillToRect l="50000" t="50000" r="50000" b="50000"/>
-          </a:path>
-        </a:gradFill>
-      </a:bgFillStyleLst>
-    </a:fmtScheme>
-  </a:themeElements>
-</a:theme>
 </file>